--- a/set/2026-04-03 El Camino Set.pptx
+++ b/set/2026-04-03 El Camino Set.pptx
@@ -2,7 +2,7 @@
 <file path=ppt/presentation.xml><?xml version="1.0" encoding="utf-8"?>
 <p:presentation xmlns:a="http://schemas.openxmlformats.org/drawingml/2006/main" xmlns:r="http://schemas.openxmlformats.org/officeDocument/2006/relationships" xmlns:p="http://schemas.openxmlformats.org/presentationml/2006/main" saveSubsetFonts="1" autoCompressPictures="0">
   <p:sldMasterIdLst>
-    <p:sldMasterId id="2147483648" r:id="rId1"/>
+    <p:sldMasterId id="2147483660" r:id="rId1"/>
   </p:sldMasterIdLst>
   <p:sldIdLst>
     <p:sldId id="329" r:id="rId2"/>
@@ -52,13 +52,13 @@
     <p:sldId id="283" r:id="rId46"/>
     <p:sldId id="281" r:id="rId47"/>
   </p:sldIdLst>
-  <p:sldSz cx="12192000" cy="6858000"/>
+  <p:sldSz cx="9144000" cy="6858000" type="screen4x3"/>
   <p:notesSz cx="6858000" cy="9144000"/>
   <p:defaultTextStyle>
     <a:defPPr>
       <a:defRPr lang="en-US"/>
     </a:defPPr>
-    <a:lvl1pPr marL="0" algn="l" defTabSz="914400" rtl="0" eaLnBrk="1" latinLnBrk="0" hangingPunct="1">
+    <a:lvl1pPr marL="0" algn="l" defTabSz="457200" rtl="0" eaLnBrk="1" latinLnBrk="0" hangingPunct="1">
       <a:defRPr sz="1800" kern="1200">
         <a:solidFill>
           <a:schemeClr val="tx1"/>
@@ -68,7 +68,7 @@
         <a:cs typeface="+mn-cs"/>
       </a:defRPr>
     </a:lvl1pPr>
-    <a:lvl2pPr marL="457200" algn="l" defTabSz="914400" rtl="0" eaLnBrk="1" latinLnBrk="0" hangingPunct="1">
+    <a:lvl2pPr marL="457200" algn="l" defTabSz="457200" rtl="0" eaLnBrk="1" latinLnBrk="0" hangingPunct="1">
       <a:defRPr sz="1800" kern="1200">
         <a:solidFill>
           <a:schemeClr val="tx1"/>
@@ -78,7 +78,7 @@
         <a:cs typeface="+mn-cs"/>
       </a:defRPr>
     </a:lvl2pPr>
-    <a:lvl3pPr marL="914400" algn="l" defTabSz="914400" rtl="0" eaLnBrk="1" latinLnBrk="0" hangingPunct="1">
+    <a:lvl3pPr marL="914400" algn="l" defTabSz="457200" rtl="0" eaLnBrk="1" latinLnBrk="0" hangingPunct="1">
       <a:defRPr sz="1800" kern="1200">
         <a:solidFill>
           <a:schemeClr val="tx1"/>
@@ -88,7 +88,7 @@
         <a:cs typeface="+mn-cs"/>
       </a:defRPr>
     </a:lvl3pPr>
-    <a:lvl4pPr marL="1371600" algn="l" defTabSz="914400" rtl="0" eaLnBrk="1" latinLnBrk="0" hangingPunct="1">
+    <a:lvl4pPr marL="1371600" algn="l" defTabSz="457200" rtl="0" eaLnBrk="1" latinLnBrk="0" hangingPunct="1">
       <a:defRPr sz="1800" kern="1200">
         <a:solidFill>
           <a:schemeClr val="tx1"/>
@@ -98,7 +98,7 @@
         <a:cs typeface="+mn-cs"/>
       </a:defRPr>
     </a:lvl4pPr>
-    <a:lvl5pPr marL="1828800" algn="l" defTabSz="914400" rtl="0" eaLnBrk="1" latinLnBrk="0" hangingPunct="1">
+    <a:lvl5pPr marL="1828800" algn="l" defTabSz="457200" rtl="0" eaLnBrk="1" latinLnBrk="0" hangingPunct="1">
       <a:defRPr sz="1800" kern="1200">
         <a:solidFill>
           <a:schemeClr val="tx1"/>
@@ -108,7 +108,7 @@
         <a:cs typeface="+mn-cs"/>
       </a:defRPr>
     </a:lvl5pPr>
-    <a:lvl6pPr marL="2286000" algn="l" defTabSz="914400" rtl="0" eaLnBrk="1" latinLnBrk="0" hangingPunct="1">
+    <a:lvl6pPr marL="2286000" algn="l" defTabSz="457200" rtl="0" eaLnBrk="1" latinLnBrk="0" hangingPunct="1">
       <a:defRPr sz="1800" kern="1200">
         <a:solidFill>
           <a:schemeClr val="tx1"/>
@@ -118,7 +118,7 @@
         <a:cs typeface="+mn-cs"/>
       </a:defRPr>
     </a:lvl6pPr>
-    <a:lvl7pPr marL="2743200" algn="l" defTabSz="914400" rtl="0" eaLnBrk="1" latinLnBrk="0" hangingPunct="1">
+    <a:lvl7pPr marL="2743200" algn="l" defTabSz="457200" rtl="0" eaLnBrk="1" latinLnBrk="0" hangingPunct="1">
       <a:defRPr sz="1800" kern="1200">
         <a:solidFill>
           <a:schemeClr val="tx1"/>
@@ -128,7 +128,7 @@
         <a:cs typeface="+mn-cs"/>
       </a:defRPr>
     </a:lvl7pPr>
-    <a:lvl8pPr marL="3200400" algn="l" defTabSz="914400" rtl="0" eaLnBrk="1" latinLnBrk="0" hangingPunct="1">
+    <a:lvl8pPr marL="3200400" algn="l" defTabSz="457200" rtl="0" eaLnBrk="1" latinLnBrk="0" hangingPunct="1">
       <a:defRPr sz="1800" kern="1200">
         <a:solidFill>
           <a:schemeClr val="tx1"/>
@@ -138,7 +138,7 @@
         <a:cs typeface="+mn-cs"/>
       </a:defRPr>
     </a:lvl8pPr>
-    <a:lvl9pPr marL="3657600" algn="l" defTabSz="914400" rtl="0" eaLnBrk="1" latinLnBrk="0" hangingPunct="1">
+    <a:lvl9pPr marL="3657600" algn="l" defTabSz="457200" rtl="0" eaLnBrk="1" latinLnBrk="0" hangingPunct="1">
       <a:defRPr sz="1800" kern="1200">
         <a:solidFill>
           <a:schemeClr val="tx1"/>
@@ -176,13 +176,7 @@
       </p:grpSpPr>
       <p:sp>
         <p:nvSpPr>
-          <p:cNvPr id="2" name="Title 1">
-            <a:extLst>
-              <a:ext uri="{FF2B5EF4-FFF2-40B4-BE49-F238E27FC236}">
-                <a16:creationId xmlns:a16="http://schemas.microsoft.com/office/drawing/2014/main" id="{50FC4881-024B-CA4F-1A53-33C2DC0E7490}"/>
-              </a:ext>
-            </a:extLst>
-          </p:cNvPr>
+          <p:cNvPr id="2" name="Title 1"/>
           <p:cNvSpPr>
             <a:spLocks noGrp="1"/>
           </p:cNvSpPr>
@@ -192,8 +186,8 @@
         </p:nvSpPr>
         <p:spPr>
           <a:xfrm>
-            <a:off x="1524000" y="1122363"/>
-            <a:ext cx="9144000" cy="2387600"/>
+            <a:off x="685800" y="1122363"/>
+            <a:ext cx="7772400" cy="2387600"/>
           </a:xfrm>
         </p:spPr>
         <p:txBody>
@@ -208,18 +202,13 @@
               <a:rPr lang="en-US"/>
               <a:t>Click to edit Master title style</a:t>
             </a:r>
-          </a:p>
-        </p:txBody>
-      </p:sp>
-      <p:sp>
-        <p:nvSpPr>
-          <p:cNvPr id="3" name="Subtitle 2">
-            <a:extLst>
-              <a:ext uri="{FF2B5EF4-FFF2-40B4-BE49-F238E27FC236}">
-                <a16:creationId xmlns:a16="http://schemas.microsoft.com/office/drawing/2014/main" id="{8B0D2959-CEED-C8E4-130C-7C436E2473A7}"/>
-              </a:ext>
-            </a:extLst>
-          </p:cNvPr>
+            <a:endParaRPr lang="en-US" dirty="0"/>
+          </a:p>
+        </p:txBody>
+      </p:sp>
+      <p:sp>
+        <p:nvSpPr>
+          <p:cNvPr id="3" name="Subtitle 2"/>
           <p:cNvSpPr>
             <a:spLocks noGrp="1"/>
           </p:cNvSpPr>
@@ -229,8 +218,8 @@
         </p:nvSpPr>
         <p:spPr>
           <a:xfrm>
-            <a:off x="1524000" y="3602038"/>
-            <a:ext cx="9144000" cy="1655762"/>
+            <a:off x="1143000" y="3602038"/>
+            <a:ext cx="6858000" cy="1655762"/>
           </a:xfrm>
         </p:spPr>
         <p:txBody>
@@ -278,18 +267,13 @@
               <a:rPr lang="en-US"/>
               <a:t>Click to edit Master subtitle style</a:t>
             </a:r>
-          </a:p>
-        </p:txBody>
-      </p:sp>
-      <p:sp>
-        <p:nvSpPr>
-          <p:cNvPr id="4" name="Date Placeholder 3">
-            <a:extLst>
-              <a:ext uri="{FF2B5EF4-FFF2-40B4-BE49-F238E27FC236}">
-                <a16:creationId xmlns:a16="http://schemas.microsoft.com/office/drawing/2014/main" id="{4ABBB692-36FC-D0C6-12D7-33A0E66EA065}"/>
-              </a:ext>
-            </a:extLst>
-          </p:cNvPr>
+            <a:endParaRPr lang="en-US" dirty="0"/>
+          </a:p>
+        </p:txBody>
+      </p:sp>
+      <p:sp>
+        <p:nvSpPr>
+          <p:cNvPr id="4" name="Date Placeholder 3"/>
           <p:cNvSpPr>
             <a:spLocks noGrp="1"/>
           </p:cNvSpPr>
@@ -304,7 +288,7 @@
           <a:p>
             <a:fld id="{E759A0DE-F190-5444-87AC-4719D5F20D15}" type="datetimeFigureOut">
               <a:rPr lang="en-US" smtClean="0"/>
-              <a:t>4/3/26</a:t>
+              <a:t>6/13/26</a:t>
             </a:fld>
             <a:endParaRPr lang="en-US"/>
           </a:p>
@@ -312,13 +296,7 @@
       </p:sp>
       <p:sp>
         <p:nvSpPr>
-          <p:cNvPr id="5" name="Footer Placeholder 4">
-            <a:extLst>
-              <a:ext uri="{FF2B5EF4-FFF2-40B4-BE49-F238E27FC236}">
-                <a16:creationId xmlns:a16="http://schemas.microsoft.com/office/drawing/2014/main" id="{51817876-8CFB-960B-6A57-C7F9FD39D3EC}"/>
-              </a:ext>
-            </a:extLst>
-          </p:cNvPr>
+          <p:cNvPr id="5" name="Footer Placeholder 4"/>
           <p:cNvSpPr>
             <a:spLocks noGrp="1"/>
           </p:cNvSpPr>
@@ -337,13 +315,7 @@
       </p:sp>
       <p:sp>
         <p:nvSpPr>
-          <p:cNvPr id="6" name="Slide Number Placeholder 5">
-            <a:extLst>
-              <a:ext uri="{FF2B5EF4-FFF2-40B4-BE49-F238E27FC236}">
-                <a16:creationId xmlns:a16="http://schemas.microsoft.com/office/drawing/2014/main" id="{DB548E83-1153-3307-5818-CD7F2833A3F5}"/>
-              </a:ext>
-            </a:extLst>
-          </p:cNvPr>
+          <p:cNvPr id="6" name="Slide Number Placeholder 5"/>
           <p:cNvSpPr>
             <a:spLocks noGrp="1"/>
           </p:cNvSpPr>
@@ -367,7 +339,7 @@
     </p:spTree>
     <p:extLst>
       <p:ext uri="{BB962C8B-B14F-4D97-AF65-F5344CB8AC3E}">
-        <p14:creationId xmlns:p14="http://schemas.microsoft.com/office/powerpoint/2010/main" val="2594881872"/>
+        <p14:creationId xmlns:p14="http://schemas.microsoft.com/office/powerpoint/2010/main" val="3299853654"/>
       </p:ext>
     </p:extLst>
   </p:cSld>
@@ -396,13 +368,7 @@
       </p:grpSpPr>
       <p:sp>
         <p:nvSpPr>
-          <p:cNvPr id="2" name="Title 1">
-            <a:extLst>
-              <a:ext uri="{FF2B5EF4-FFF2-40B4-BE49-F238E27FC236}">
-                <a16:creationId xmlns:a16="http://schemas.microsoft.com/office/drawing/2014/main" id="{9015C597-3152-5765-EBC1-B17D9951543D}"/>
-              </a:ext>
-            </a:extLst>
-          </p:cNvPr>
+          <p:cNvPr id="2" name="Title 1"/>
           <p:cNvSpPr>
             <a:spLocks noGrp="1"/>
           </p:cNvSpPr>
@@ -419,18 +385,13 @@
               <a:rPr lang="en-US"/>
               <a:t>Click to edit Master title style</a:t>
             </a:r>
-          </a:p>
-        </p:txBody>
-      </p:sp>
-      <p:sp>
-        <p:nvSpPr>
-          <p:cNvPr id="3" name="Vertical Text Placeholder 2">
-            <a:extLst>
-              <a:ext uri="{FF2B5EF4-FFF2-40B4-BE49-F238E27FC236}">
-                <a16:creationId xmlns:a16="http://schemas.microsoft.com/office/drawing/2014/main" id="{5BA5F73E-18E1-021C-9878-B37DC31E2802}"/>
-              </a:ext>
-            </a:extLst>
-          </p:cNvPr>
+            <a:endParaRPr lang="en-US" dirty="0"/>
+          </a:p>
+        </p:txBody>
+      </p:sp>
+      <p:sp>
+        <p:nvSpPr>
+          <p:cNvPr id="3" name="Vertical Text Placeholder 2"/>
           <p:cNvSpPr>
             <a:spLocks noGrp="1"/>
           </p:cNvSpPr>
@@ -476,18 +437,13 @@
               <a:rPr lang="en-US"/>
               <a:t>Fifth level</a:t>
             </a:r>
-          </a:p>
-        </p:txBody>
-      </p:sp>
-      <p:sp>
-        <p:nvSpPr>
-          <p:cNvPr id="4" name="Date Placeholder 3">
-            <a:extLst>
-              <a:ext uri="{FF2B5EF4-FFF2-40B4-BE49-F238E27FC236}">
-                <a16:creationId xmlns:a16="http://schemas.microsoft.com/office/drawing/2014/main" id="{B683AF53-E0B5-2F63-C15E-4BF621A3186B}"/>
-              </a:ext>
-            </a:extLst>
-          </p:cNvPr>
+            <a:endParaRPr lang="en-US" dirty="0"/>
+          </a:p>
+        </p:txBody>
+      </p:sp>
+      <p:sp>
+        <p:nvSpPr>
+          <p:cNvPr id="4" name="Date Placeholder 3"/>
           <p:cNvSpPr>
             <a:spLocks noGrp="1"/>
           </p:cNvSpPr>
@@ -502,7 +458,7 @@
           <a:p>
             <a:fld id="{E759A0DE-F190-5444-87AC-4719D5F20D15}" type="datetimeFigureOut">
               <a:rPr lang="en-US" smtClean="0"/>
-              <a:t>4/3/26</a:t>
+              <a:t>6/13/26</a:t>
             </a:fld>
             <a:endParaRPr lang="en-US"/>
           </a:p>
@@ -510,13 +466,7 @@
       </p:sp>
       <p:sp>
         <p:nvSpPr>
-          <p:cNvPr id="5" name="Footer Placeholder 4">
-            <a:extLst>
-              <a:ext uri="{FF2B5EF4-FFF2-40B4-BE49-F238E27FC236}">
-                <a16:creationId xmlns:a16="http://schemas.microsoft.com/office/drawing/2014/main" id="{D1CA465D-C46F-7FA4-9154-773B74869505}"/>
-              </a:ext>
-            </a:extLst>
-          </p:cNvPr>
+          <p:cNvPr id="5" name="Footer Placeholder 4"/>
           <p:cNvSpPr>
             <a:spLocks noGrp="1"/>
           </p:cNvSpPr>
@@ -535,13 +485,7 @@
       </p:sp>
       <p:sp>
         <p:nvSpPr>
-          <p:cNvPr id="6" name="Slide Number Placeholder 5">
-            <a:extLst>
-              <a:ext uri="{FF2B5EF4-FFF2-40B4-BE49-F238E27FC236}">
-                <a16:creationId xmlns:a16="http://schemas.microsoft.com/office/drawing/2014/main" id="{BBA3BEE5-DE05-B54F-20CA-E8C336AE957E}"/>
-              </a:ext>
-            </a:extLst>
-          </p:cNvPr>
+          <p:cNvPr id="6" name="Slide Number Placeholder 5"/>
           <p:cNvSpPr>
             <a:spLocks noGrp="1"/>
           </p:cNvSpPr>
@@ -565,7 +509,7 @@
     </p:spTree>
     <p:extLst>
       <p:ext uri="{BB962C8B-B14F-4D97-AF65-F5344CB8AC3E}">
-        <p14:creationId xmlns:p14="http://schemas.microsoft.com/office/powerpoint/2010/main" val="3115587574"/>
+        <p14:creationId xmlns:p14="http://schemas.microsoft.com/office/powerpoint/2010/main" val="3937726491"/>
       </p:ext>
     </p:extLst>
   </p:cSld>
@@ -594,13 +538,7 @@
       </p:grpSpPr>
       <p:sp>
         <p:nvSpPr>
-          <p:cNvPr id="2" name="Vertical Title 1">
-            <a:extLst>
-              <a:ext uri="{FF2B5EF4-FFF2-40B4-BE49-F238E27FC236}">
-                <a16:creationId xmlns:a16="http://schemas.microsoft.com/office/drawing/2014/main" id="{42C72931-C193-DCDC-01FD-20CDA0AD4513}"/>
-              </a:ext>
-            </a:extLst>
-          </p:cNvPr>
+          <p:cNvPr id="2" name="Vertical Title 1"/>
           <p:cNvSpPr>
             <a:spLocks noGrp="1"/>
           </p:cNvSpPr>
@@ -610,8 +548,8 @@
         </p:nvSpPr>
         <p:spPr>
           <a:xfrm>
-            <a:off x="8724900" y="365125"/>
-            <a:ext cx="2628900" cy="5811838"/>
+            <a:off x="6543675" y="365125"/>
+            <a:ext cx="1971675" cy="5811838"/>
           </a:xfrm>
         </p:spPr>
         <p:txBody>
@@ -622,18 +560,13 @@
               <a:rPr lang="en-US"/>
               <a:t>Click to edit Master title style</a:t>
             </a:r>
-          </a:p>
-        </p:txBody>
-      </p:sp>
-      <p:sp>
-        <p:nvSpPr>
-          <p:cNvPr id="3" name="Vertical Text Placeholder 2">
-            <a:extLst>
-              <a:ext uri="{FF2B5EF4-FFF2-40B4-BE49-F238E27FC236}">
-                <a16:creationId xmlns:a16="http://schemas.microsoft.com/office/drawing/2014/main" id="{E65B2C1B-4D9D-9A62-13D7-01C6580B781D}"/>
-              </a:ext>
-            </a:extLst>
-          </p:cNvPr>
+            <a:endParaRPr lang="en-US" dirty="0"/>
+          </a:p>
+        </p:txBody>
+      </p:sp>
+      <p:sp>
+        <p:nvSpPr>
+          <p:cNvPr id="3" name="Vertical Text Placeholder 2"/>
           <p:cNvSpPr>
             <a:spLocks noGrp="1"/>
           </p:cNvSpPr>
@@ -643,8 +576,8 @@
         </p:nvSpPr>
         <p:spPr>
           <a:xfrm>
-            <a:off x="838200" y="365125"/>
-            <a:ext cx="7734300" cy="5811838"/>
+            <a:off x="628650" y="365125"/>
+            <a:ext cx="5800725" cy="5811838"/>
           </a:xfrm>
         </p:spPr>
         <p:txBody>
@@ -684,18 +617,13 @@
               <a:rPr lang="en-US"/>
               <a:t>Fifth level</a:t>
             </a:r>
-          </a:p>
-        </p:txBody>
-      </p:sp>
-      <p:sp>
-        <p:nvSpPr>
-          <p:cNvPr id="4" name="Date Placeholder 3">
-            <a:extLst>
-              <a:ext uri="{FF2B5EF4-FFF2-40B4-BE49-F238E27FC236}">
-                <a16:creationId xmlns:a16="http://schemas.microsoft.com/office/drawing/2014/main" id="{57445465-66E1-00A0-A5D2-D034616CC34D}"/>
-              </a:ext>
-            </a:extLst>
-          </p:cNvPr>
+            <a:endParaRPr lang="en-US" dirty="0"/>
+          </a:p>
+        </p:txBody>
+      </p:sp>
+      <p:sp>
+        <p:nvSpPr>
+          <p:cNvPr id="4" name="Date Placeholder 3"/>
           <p:cNvSpPr>
             <a:spLocks noGrp="1"/>
           </p:cNvSpPr>
@@ -710,7 +638,7 @@
           <a:p>
             <a:fld id="{E759A0DE-F190-5444-87AC-4719D5F20D15}" type="datetimeFigureOut">
               <a:rPr lang="en-US" smtClean="0"/>
-              <a:t>4/3/26</a:t>
+              <a:t>6/13/26</a:t>
             </a:fld>
             <a:endParaRPr lang="en-US"/>
           </a:p>
@@ -718,13 +646,7 @@
       </p:sp>
       <p:sp>
         <p:nvSpPr>
-          <p:cNvPr id="5" name="Footer Placeholder 4">
-            <a:extLst>
-              <a:ext uri="{FF2B5EF4-FFF2-40B4-BE49-F238E27FC236}">
-                <a16:creationId xmlns:a16="http://schemas.microsoft.com/office/drawing/2014/main" id="{F253519E-C69A-9396-C73F-1ACB40774508}"/>
-              </a:ext>
-            </a:extLst>
-          </p:cNvPr>
+          <p:cNvPr id="5" name="Footer Placeholder 4"/>
           <p:cNvSpPr>
             <a:spLocks noGrp="1"/>
           </p:cNvSpPr>
@@ -743,13 +665,7 @@
       </p:sp>
       <p:sp>
         <p:nvSpPr>
-          <p:cNvPr id="6" name="Slide Number Placeholder 5">
-            <a:extLst>
-              <a:ext uri="{FF2B5EF4-FFF2-40B4-BE49-F238E27FC236}">
-                <a16:creationId xmlns:a16="http://schemas.microsoft.com/office/drawing/2014/main" id="{CC85BFC6-ABA4-44D2-E110-CE59D7D2AE43}"/>
-              </a:ext>
-            </a:extLst>
-          </p:cNvPr>
+          <p:cNvPr id="6" name="Slide Number Placeholder 5"/>
           <p:cNvSpPr>
             <a:spLocks noGrp="1"/>
           </p:cNvSpPr>
@@ -773,7 +689,7 @@
     </p:spTree>
     <p:extLst>
       <p:ext uri="{BB962C8B-B14F-4D97-AF65-F5344CB8AC3E}">
-        <p14:creationId xmlns:p14="http://schemas.microsoft.com/office/powerpoint/2010/main" val="1588597314"/>
+        <p14:creationId xmlns:p14="http://schemas.microsoft.com/office/powerpoint/2010/main" val="1301085835"/>
       </p:ext>
     </p:extLst>
   </p:cSld>
@@ -802,13 +718,7 @@
       </p:grpSpPr>
       <p:sp>
         <p:nvSpPr>
-          <p:cNvPr id="2" name="Title 1">
-            <a:extLst>
-              <a:ext uri="{FF2B5EF4-FFF2-40B4-BE49-F238E27FC236}">
-                <a16:creationId xmlns:a16="http://schemas.microsoft.com/office/drawing/2014/main" id="{A4C6B7EA-B38C-12D1-5730-E271A11FB914}"/>
-              </a:ext>
-            </a:extLst>
-          </p:cNvPr>
+          <p:cNvPr id="2" name="Title 1"/>
           <p:cNvSpPr>
             <a:spLocks noGrp="1"/>
           </p:cNvSpPr>
@@ -825,18 +735,13 @@
               <a:rPr lang="en-US"/>
               <a:t>Click to edit Master title style</a:t>
             </a:r>
-          </a:p>
-        </p:txBody>
-      </p:sp>
-      <p:sp>
-        <p:nvSpPr>
-          <p:cNvPr id="3" name="Content Placeholder 2">
-            <a:extLst>
-              <a:ext uri="{FF2B5EF4-FFF2-40B4-BE49-F238E27FC236}">
-                <a16:creationId xmlns:a16="http://schemas.microsoft.com/office/drawing/2014/main" id="{5D8D1A30-880C-91DF-D6D6-0BE623BC9F03}"/>
-              </a:ext>
-            </a:extLst>
-          </p:cNvPr>
+            <a:endParaRPr lang="en-US" dirty="0"/>
+          </a:p>
+        </p:txBody>
+      </p:sp>
+      <p:sp>
+        <p:nvSpPr>
+          <p:cNvPr id="3" name="Content Placeholder 2"/>
           <p:cNvSpPr>
             <a:spLocks noGrp="1"/>
           </p:cNvSpPr>
@@ -882,18 +787,13 @@
               <a:rPr lang="en-US"/>
               <a:t>Fifth level</a:t>
             </a:r>
-          </a:p>
-        </p:txBody>
-      </p:sp>
-      <p:sp>
-        <p:nvSpPr>
-          <p:cNvPr id="4" name="Date Placeholder 3">
-            <a:extLst>
-              <a:ext uri="{FF2B5EF4-FFF2-40B4-BE49-F238E27FC236}">
-                <a16:creationId xmlns:a16="http://schemas.microsoft.com/office/drawing/2014/main" id="{27753098-E2DC-41B2-9361-756938A8EBFE}"/>
-              </a:ext>
-            </a:extLst>
-          </p:cNvPr>
+            <a:endParaRPr lang="en-US" dirty="0"/>
+          </a:p>
+        </p:txBody>
+      </p:sp>
+      <p:sp>
+        <p:nvSpPr>
+          <p:cNvPr id="4" name="Date Placeholder 3"/>
           <p:cNvSpPr>
             <a:spLocks noGrp="1"/>
           </p:cNvSpPr>
@@ -908,7 +808,7 @@
           <a:p>
             <a:fld id="{E759A0DE-F190-5444-87AC-4719D5F20D15}" type="datetimeFigureOut">
               <a:rPr lang="en-US" smtClean="0"/>
-              <a:t>4/3/26</a:t>
+              <a:t>6/13/26</a:t>
             </a:fld>
             <a:endParaRPr lang="en-US"/>
           </a:p>
@@ -916,13 +816,7 @@
       </p:sp>
       <p:sp>
         <p:nvSpPr>
-          <p:cNvPr id="5" name="Footer Placeholder 4">
-            <a:extLst>
-              <a:ext uri="{FF2B5EF4-FFF2-40B4-BE49-F238E27FC236}">
-                <a16:creationId xmlns:a16="http://schemas.microsoft.com/office/drawing/2014/main" id="{E463E6B5-5EA8-FE6C-FA06-4515DC0C07A4}"/>
-              </a:ext>
-            </a:extLst>
-          </p:cNvPr>
+          <p:cNvPr id="5" name="Footer Placeholder 4"/>
           <p:cNvSpPr>
             <a:spLocks noGrp="1"/>
           </p:cNvSpPr>
@@ -941,13 +835,7 @@
       </p:sp>
       <p:sp>
         <p:nvSpPr>
-          <p:cNvPr id="6" name="Slide Number Placeholder 5">
-            <a:extLst>
-              <a:ext uri="{FF2B5EF4-FFF2-40B4-BE49-F238E27FC236}">
-                <a16:creationId xmlns:a16="http://schemas.microsoft.com/office/drawing/2014/main" id="{196A6D58-9856-3B55-DBEA-1B9A3269B325}"/>
-              </a:ext>
-            </a:extLst>
-          </p:cNvPr>
+          <p:cNvPr id="6" name="Slide Number Placeholder 5"/>
           <p:cNvSpPr>
             <a:spLocks noGrp="1"/>
           </p:cNvSpPr>
@@ -971,7 +859,7 @@
     </p:spTree>
     <p:extLst>
       <p:ext uri="{BB962C8B-B14F-4D97-AF65-F5344CB8AC3E}">
-        <p14:creationId xmlns:p14="http://schemas.microsoft.com/office/powerpoint/2010/main" val="1474312020"/>
+        <p14:creationId xmlns:p14="http://schemas.microsoft.com/office/powerpoint/2010/main" val="568790689"/>
       </p:ext>
     </p:extLst>
   </p:cSld>
@@ -1000,13 +888,7 @@
       </p:grpSpPr>
       <p:sp>
         <p:nvSpPr>
-          <p:cNvPr id="2" name="Title 1">
-            <a:extLst>
-              <a:ext uri="{FF2B5EF4-FFF2-40B4-BE49-F238E27FC236}">
-                <a16:creationId xmlns:a16="http://schemas.microsoft.com/office/drawing/2014/main" id="{F3003BE6-BFB2-0EF8-7BD3-99B4FF56B7C7}"/>
-              </a:ext>
-            </a:extLst>
-          </p:cNvPr>
+          <p:cNvPr id="2" name="Title 1"/>
           <p:cNvSpPr>
             <a:spLocks noGrp="1"/>
           </p:cNvSpPr>
@@ -1016,8 +898,8 @@
         </p:nvSpPr>
         <p:spPr>
           <a:xfrm>
-            <a:off x="831850" y="1709738"/>
-            <a:ext cx="10515600" cy="2852737"/>
+            <a:off x="623888" y="1709739"/>
+            <a:ext cx="7886700" cy="2852737"/>
           </a:xfrm>
         </p:spPr>
         <p:txBody>
@@ -1032,18 +914,13 @@
               <a:rPr lang="en-US"/>
               <a:t>Click to edit Master title style</a:t>
             </a:r>
-          </a:p>
-        </p:txBody>
-      </p:sp>
-      <p:sp>
-        <p:nvSpPr>
-          <p:cNvPr id="3" name="Text Placeholder 2">
-            <a:extLst>
-              <a:ext uri="{FF2B5EF4-FFF2-40B4-BE49-F238E27FC236}">
-                <a16:creationId xmlns:a16="http://schemas.microsoft.com/office/drawing/2014/main" id="{95E87140-F157-4DFF-CE20-2F5B759FC1E1}"/>
-              </a:ext>
-            </a:extLst>
-          </p:cNvPr>
+            <a:endParaRPr lang="en-US" dirty="0"/>
+          </a:p>
+        </p:txBody>
+      </p:sp>
+      <p:sp>
+        <p:nvSpPr>
+          <p:cNvPr id="3" name="Text Placeholder 2"/>
           <p:cNvSpPr>
             <a:spLocks noGrp="1"/>
           </p:cNvSpPr>
@@ -1053,8 +930,8 @@
         </p:nvSpPr>
         <p:spPr>
           <a:xfrm>
-            <a:off x="831850" y="4589463"/>
-            <a:ext cx="10515600" cy="1500187"/>
+            <a:off x="623888" y="4589464"/>
+            <a:ext cx="7886700" cy="1500187"/>
           </a:xfrm>
         </p:spPr>
         <p:txBody>
@@ -1162,13 +1039,7 @@
       </p:sp>
       <p:sp>
         <p:nvSpPr>
-          <p:cNvPr id="4" name="Date Placeholder 3">
-            <a:extLst>
-              <a:ext uri="{FF2B5EF4-FFF2-40B4-BE49-F238E27FC236}">
-                <a16:creationId xmlns:a16="http://schemas.microsoft.com/office/drawing/2014/main" id="{E119DC89-D1D7-E179-4B62-551014DFE5B3}"/>
-              </a:ext>
-            </a:extLst>
-          </p:cNvPr>
+          <p:cNvPr id="4" name="Date Placeholder 3"/>
           <p:cNvSpPr>
             <a:spLocks noGrp="1"/>
           </p:cNvSpPr>
@@ -1183,7 +1054,7 @@
           <a:p>
             <a:fld id="{E759A0DE-F190-5444-87AC-4719D5F20D15}" type="datetimeFigureOut">
               <a:rPr lang="en-US" smtClean="0"/>
-              <a:t>4/3/26</a:t>
+              <a:t>6/13/26</a:t>
             </a:fld>
             <a:endParaRPr lang="en-US"/>
           </a:p>
@@ -1191,13 +1062,7 @@
       </p:sp>
       <p:sp>
         <p:nvSpPr>
-          <p:cNvPr id="5" name="Footer Placeholder 4">
-            <a:extLst>
-              <a:ext uri="{FF2B5EF4-FFF2-40B4-BE49-F238E27FC236}">
-                <a16:creationId xmlns:a16="http://schemas.microsoft.com/office/drawing/2014/main" id="{0DC033CF-70D2-4EFC-5477-15F7486A8F3C}"/>
-              </a:ext>
-            </a:extLst>
-          </p:cNvPr>
+          <p:cNvPr id="5" name="Footer Placeholder 4"/>
           <p:cNvSpPr>
             <a:spLocks noGrp="1"/>
           </p:cNvSpPr>
@@ -1216,13 +1081,7 @@
       </p:sp>
       <p:sp>
         <p:nvSpPr>
-          <p:cNvPr id="6" name="Slide Number Placeholder 5">
-            <a:extLst>
-              <a:ext uri="{FF2B5EF4-FFF2-40B4-BE49-F238E27FC236}">
-                <a16:creationId xmlns:a16="http://schemas.microsoft.com/office/drawing/2014/main" id="{797ECCF9-ED4E-20EE-67CD-F55D0D853A8C}"/>
-              </a:ext>
-            </a:extLst>
-          </p:cNvPr>
+          <p:cNvPr id="6" name="Slide Number Placeholder 5"/>
           <p:cNvSpPr>
             <a:spLocks noGrp="1"/>
           </p:cNvSpPr>
@@ -1246,7 +1105,7 @@
     </p:spTree>
     <p:extLst>
       <p:ext uri="{BB962C8B-B14F-4D97-AF65-F5344CB8AC3E}">
-        <p14:creationId xmlns:p14="http://schemas.microsoft.com/office/powerpoint/2010/main" val="3736666041"/>
+        <p14:creationId xmlns:p14="http://schemas.microsoft.com/office/powerpoint/2010/main" val="1927645629"/>
       </p:ext>
     </p:extLst>
   </p:cSld>
@@ -1275,13 +1134,7 @@
       </p:grpSpPr>
       <p:sp>
         <p:nvSpPr>
-          <p:cNvPr id="2" name="Title 1">
-            <a:extLst>
-              <a:ext uri="{FF2B5EF4-FFF2-40B4-BE49-F238E27FC236}">
-                <a16:creationId xmlns:a16="http://schemas.microsoft.com/office/drawing/2014/main" id="{74DD7124-6407-E388-DFAC-CEAEF342D72D}"/>
-              </a:ext>
-            </a:extLst>
-          </p:cNvPr>
+          <p:cNvPr id="2" name="Title 1"/>
           <p:cNvSpPr>
             <a:spLocks noGrp="1"/>
           </p:cNvSpPr>
@@ -1298,18 +1151,13 @@
               <a:rPr lang="en-US"/>
               <a:t>Click to edit Master title style</a:t>
             </a:r>
-          </a:p>
-        </p:txBody>
-      </p:sp>
-      <p:sp>
-        <p:nvSpPr>
-          <p:cNvPr id="3" name="Content Placeholder 2">
-            <a:extLst>
-              <a:ext uri="{FF2B5EF4-FFF2-40B4-BE49-F238E27FC236}">
-                <a16:creationId xmlns:a16="http://schemas.microsoft.com/office/drawing/2014/main" id="{0354C6C2-33DA-0102-6360-654F993BD701}"/>
-              </a:ext>
-            </a:extLst>
-          </p:cNvPr>
+            <a:endParaRPr lang="en-US" dirty="0"/>
+          </a:p>
+        </p:txBody>
+      </p:sp>
+      <p:sp>
+        <p:nvSpPr>
+          <p:cNvPr id="3" name="Content Placeholder 2"/>
           <p:cNvSpPr>
             <a:spLocks noGrp="1"/>
           </p:cNvSpPr>
@@ -1319,8 +1167,8 @@
         </p:nvSpPr>
         <p:spPr>
           <a:xfrm>
-            <a:off x="838200" y="1825625"/>
-            <a:ext cx="5181600" cy="4351338"/>
+            <a:off x="628650" y="1825625"/>
+            <a:ext cx="3886200" cy="4351338"/>
           </a:xfrm>
         </p:spPr>
         <p:txBody>
@@ -1360,18 +1208,13 @@
               <a:rPr lang="en-US"/>
               <a:t>Fifth level</a:t>
             </a:r>
-          </a:p>
-        </p:txBody>
-      </p:sp>
-      <p:sp>
-        <p:nvSpPr>
-          <p:cNvPr id="4" name="Content Placeholder 3">
-            <a:extLst>
-              <a:ext uri="{FF2B5EF4-FFF2-40B4-BE49-F238E27FC236}">
-                <a16:creationId xmlns:a16="http://schemas.microsoft.com/office/drawing/2014/main" id="{EE2B2A58-052B-B454-9932-012243039D08}"/>
-              </a:ext>
-            </a:extLst>
-          </p:cNvPr>
+            <a:endParaRPr lang="en-US" dirty="0"/>
+          </a:p>
+        </p:txBody>
+      </p:sp>
+      <p:sp>
+        <p:nvSpPr>
+          <p:cNvPr id="4" name="Content Placeholder 3"/>
           <p:cNvSpPr>
             <a:spLocks noGrp="1"/>
           </p:cNvSpPr>
@@ -1381,8 +1224,8 @@
         </p:nvSpPr>
         <p:spPr>
           <a:xfrm>
-            <a:off x="6172200" y="1825625"/>
-            <a:ext cx="5181600" cy="4351338"/>
+            <a:off x="4629150" y="1825625"/>
+            <a:ext cx="3886200" cy="4351338"/>
           </a:xfrm>
         </p:spPr>
         <p:txBody>
@@ -1422,18 +1265,13 @@
               <a:rPr lang="en-US"/>
               <a:t>Fifth level</a:t>
             </a:r>
-          </a:p>
-        </p:txBody>
-      </p:sp>
-      <p:sp>
-        <p:nvSpPr>
-          <p:cNvPr id="5" name="Date Placeholder 4">
-            <a:extLst>
-              <a:ext uri="{FF2B5EF4-FFF2-40B4-BE49-F238E27FC236}">
-                <a16:creationId xmlns:a16="http://schemas.microsoft.com/office/drawing/2014/main" id="{52B92D04-ECBD-D55F-A459-4C28DF6A8C2E}"/>
-              </a:ext>
-            </a:extLst>
-          </p:cNvPr>
+            <a:endParaRPr lang="en-US" dirty="0"/>
+          </a:p>
+        </p:txBody>
+      </p:sp>
+      <p:sp>
+        <p:nvSpPr>
+          <p:cNvPr id="5" name="Date Placeholder 4"/>
           <p:cNvSpPr>
             <a:spLocks noGrp="1"/>
           </p:cNvSpPr>
@@ -1448,7 +1286,7 @@
           <a:p>
             <a:fld id="{E759A0DE-F190-5444-87AC-4719D5F20D15}" type="datetimeFigureOut">
               <a:rPr lang="en-US" smtClean="0"/>
-              <a:t>4/3/26</a:t>
+              <a:t>6/13/26</a:t>
             </a:fld>
             <a:endParaRPr lang="en-US"/>
           </a:p>
@@ -1456,13 +1294,7 @@
       </p:sp>
       <p:sp>
         <p:nvSpPr>
-          <p:cNvPr id="6" name="Footer Placeholder 5">
-            <a:extLst>
-              <a:ext uri="{FF2B5EF4-FFF2-40B4-BE49-F238E27FC236}">
-                <a16:creationId xmlns:a16="http://schemas.microsoft.com/office/drawing/2014/main" id="{DF69ACAC-11AF-A864-BD18-A4B426A4AA03}"/>
-              </a:ext>
-            </a:extLst>
-          </p:cNvPr>
+          <p:cNvPr id="6" name="Footer Placeholder 5"/>
           <p:cNvSpPr>
             <a:spLocks noGrp="1"/>
           </p:cNvSpPr>
@@ -1481,13 +1313,7 @@
       </p:sp>
       <p:sp>
         <p:nvSpPr>
-          <p:cNvPr id="7" name="Slide Number Placeholder 6">
-            <a:extLst>
-              <a:ext uri="{FF2B5EF4-FFF2-40B4-BE49-F238E27FC236}">
-                <a16:creationId xmlns:a16="http://schemas.microsoft.com/office/drawing/2014/main" id="{3A3C5DAC-E196-CEC3-6A6B-376BB3F37D19}"/>
-              </a:ext>
-            </a:extLst>
-          </p:cNvPr>
+          <p:cNvPr id="7" name="Slide Number Placeholder 6"/>
           <p:cNvSpPr>
             <a:spLocks noGrp="1"/>
           </p:cNvSpPr>
@@ -1511,7 +1337,7 @@
     </p:spTree>
     <p:extLst>
       <p:ext uri="{BB962C8B-B14F-4D97-AF65-F5344CB8AC3E}">
-        <p14:creationId xmlns:p14="http://schemas.microsoft.com/office/powerpoint/2010/main" val="621302458"/>
+        <p14:creationId xmlns:p14="http://schemas.microsoft.com/office/powerpoint/2010/main" val="2214944927"/>
       </p:ext>
     </p:extLst>
   </p:cSld>
@@ -1540,13 +1366,7 @@
       </p:grpSpPr>
       <p:sp>
         <p:nvSpPr>
-          <p:cNvPr id="2" name="Title 1">
-            <a:extLst>
-              <a:ext uri="{FF2B5EF4-FFF2-40B4-BE49-F238E27FC236}">
-                <a16:creationId xmlns:a16="http://schemas.microsoft.com/office/drawing/2014/main" id="{0C632820-190D-235F-CEAA-9558C5413BC1}"/>
-              </a:ext>
-            </a:extLst>
-          </p:cNvPr>
+          <p:cNvPr id="2" name="Title 1"/>
           <p:cNvSpPr>
             <a:spLocks noGrp="1"/>
           </p:cNvSpPr>
@@ -1556,8 +1376,8 @@
         </p:nvSpPr>
         <p:spPr>
           <a:xfrm>
-            <a:off x="839788" y="365125"/>
-            <a:ext cx="10515600" cy="1325563"/>
+            <a:off x="629841" y="365126"/>
+            <a:ext cx="7886700" cy="1325563"/>
           </a:xfrm>
         </p:spPr>
         <p:txBody>
@@ -1568,18 +1388,13 @@
               <a:rPr lang="en-US"/>
               <a:t>Click to edit Master title style</a:t>
             </a:r>
-          </a:p>
-        </p:txBody>
-      </p:sp>
-      <p:sp>
-        <p:nvSpPr>
-          <p:cNvPr id="3" name="Text Placeholder 2">
-            <a:extLst>
-              <a:ext uri="{FF2B5EF4-FFF2-40B4-BE49-F238E27FC236}">
-                <a16:creationId xmlns:a16="http://schemas.microsoft.com/office/drawing/2014/main" id="{16693254-6651-D942-4099-84C9B6A31CF3}"/>
-              </a:ext>
-            </a:extLst>
-          </p:cNvPr>
+            <a:endParaRPr lang="en-US" dirty="0"/>
+          </a:p>
+        </p:txBody>
+      </p:sp>
+      <p:sp>
+        <p:nvSpPr>
+          <p:cNvPr id="3" name="Text Placeholder 2"/>
           <p:cNvSpPr>
             <a:spLocks noGrp="1"/>
           </p:cNvSpPr>
@@ -1589,8 +1404,8 @@
         </p:nvSpPr>
         <p:spPr>
           <a:xfrm>
-            <a:off x="839788" y="1681163"/>
-            <a:ext cx="5157787" cy="823912"/>
+            <a:off x="629842" y="1681163"/>
+            <a:ext cx="3868340" cy="823912"/>
           </a:xfrm>
         </p:spPr>
         <p:txBody>
@@ -1644,13 +1459,7 @@
       </p:sp>
       <p:sp>
         <p:nvSpPr>
-          <p:cNvPr id="4" name="Content Placeholder 3">
-            <a:extLst>
-              <a:ext uri="{FF2B5EF4-FFF2-40B4-BE49-F238E27FC236}">
-                <a16:creationId xmlns:a16="http://schemas.microsoft.com/office/drawing/2014/main" id="{D6D4DAC3-CF47-11DC-83E8-0B1192A4422A}"/>
-              </a:ext>
-            </a:extLst>
-          </p:cNvPr>
+          <p:cNvPr id="4" name="Content Placeholder 3"/>
           <p:cNvSpPr>
             <a:spLocks noGrp="1"/>
           </p:cNvSpPr>
@@ -1660,8 +1469,8 @@
         </p:nvSpPr>
         <p:spPr>
           <a:xfrm>
-            <a:off x="839788" y="2505075"/>
-            <a:ext cx="5157787" cy="3684588"/>
+            <a:off x="629842" y="2505075"/>
+            <a:ext cx="3868340" cy="3684588"/>
           </a:xfrm>
         </p:spPr>
         <p:txBody>
@@ -1701,18 +1510,13 @@
               <a:rPr lang="en-US"/>
               <a:t>Fifth level</a:t>
             </a:r>
-          </a:p>
-        </p:txBody>
-      </p:sp>
-      <p:sp>
-        <p:nvSpPr>
-          <p:cNvPr id="5" name="Text Placeholder 4">
-            <a:extLst>
-              <a:ext uri="{FF2B5EF4-FFF2-40B4-BE49-F238E27FC236}">
-                <a16:creationId xmlns:a16="http://schemas.microsoft.com/office/drawing/2014/main" id="{3C49067B-AD0F-C796-4C8F-C043DB6FD3B3}"/>
-              </a:ext>
-            </a:extLst>
-          </p:cNvPr>
+            <a:endParaRPr lang="en-US" dirty="0"/>
+          </a:p>
+        </p:txBody>
+      </p:sp>
+      <p:sp>
+        <p:nvSpPr>
+          <p:cNvPr id="5" name="Text Placeholder 4"/>
           <p:cNvSpPr>
             <a:spLocks noGrp="1"/>
           </p:cNvSpPr>
@@ -1722,8 +1526,8 @@
         </p:nvSpPr>
         <p:spPr>
           <a:xfrm>
-            <a:off x="6172200" y="1681163"/>
-            <a:ext cx="5183188" cy="823912"/>
+            <a:off x="4629150" y="1681163"/>
+            <a:ext cx="3887391" cy="823912"/>
           </a:xfrm>
         </p:spPr>
         <p:txBody>
@@ -1777,13 +1581,7 @@
       </p:sp>
       <p:sp>
         <p:nvSpPr>
-          <p:cNvPr id="6" name="Content Placeholder 5">
-            <a:extLst>
-              <a:ext uri="{FF2B5EF4-FFF2-40B4-BE49-F238E27FC236}">
-                <a16:creationId xmlns:a16="http://schemas.microsoft.com/office/drawing/2014/main" id="{A4D0695B-675B-E8DD-D931-29E639B3E559}"/>
-              </a:ext>
-            </a:extLst>
-          </p:cNvPr>
+          <p:cNvPr id="6" name="Content Placeholder 5"/>
           <p:cNvSpPr>
             <a:spLocks noGrp="1"/>
           </p:cNvSpPr>
@@ -1793,8 +1591,8 @@
         </p:nvSpPr>
         <p:spPr>
           <a:xfrm>
-            <a:off x="6172200" y="2505075"/>
-            <a:ext cx="5183188" cy="3684588"/>
+            <a:off x="4629150" y="2505075"/>
+            <a:ext cx="3887391" cy="3684588"/>
           </a:xfrm>
         </p:spPr>
         <p:txBody>
@@ -1834,18 +1632,13 @@
               <a:rPr lang="en-US"/>
               <a:t>Fifth level</a:t>
             </a:r>
-          </a:p>
-        </p:txBody>
-      </p:sp>
-      <p:sp>
-        <p:nvSpPr>
-          <p:cNvPr id="7" name="Date Placeholder 6">
-            <a:extLst>
-              <a:ext uri="{FF2B5EF4-FFF2-40B4-BE49-F238E27FC236}">
-                <a16:creationId xmlns:a16="http://schemas.microsoft.com/office/drawing/2014/main" id="{E7F5423C-A80C-353A-6ADA-AD2195CCE83B}"/>
-              </a:ext>
-            </a:extLst>
-          </p:cNvPr>
+            <a:endParaRPr lang="en-US" dirty="0"/>
+          </a:p>
+        </p:txBody>
+      </p:sp>
+      <p:sp>
+        <p:nvSpPr>
+          <p:cNvPr id="7" name="Date Placeholder 6"/>
           <p:cNvSpPr>
             <a:spLocks noGrp="1"/>
           </p:cNvSpPr>
@@ -1860,7 +1653,7 @@
           <a:p>
             <a:fld id="{E759A0DE-F190-5444-87AC-4719D5F20D15}" type="datetimeFigureOut">
               <a:rPr lang="en-US" smtClean="0"/>
-              <a:t>4/3/26</a:t>
+              <a:t>6/13/26</a:t>
             </a:fld>
             <a:endParaRPr lang="en-US"/>
           </a:p>
@@ -1868,13 +1661,7 @@
       </p:sp>
       <p:sp>
         <p:nvSpPr>
-          <p:cNvPr id="8" name="Footer Placeholder 7">
-            <a:extLst>
-              <a:ext uri="{FF2B5EF4-FFF2-40B4-BE49-F238E27FC236}">
-                <a16:creationId xmlns:a16="http://schemas.microsoft.com/office/drawing/2014/main" id="{3154C085-1B7B-06F2-2F97-8BE5AED3D908}"/>
-              </a:ext>
-            </a:extLst>
-          </p:cNvPr>
+          <p:cNvPr id="8" name="Footer Placeholder 7"/>
           <p:cNvSpPr>
             <a:spLocks noGrp="1"/>
           </p:cNvSpPr>
@@ -1893,13 +1680,7 @@
       </p:sp>
       <p:sp>
         <p:nvSpPr>
-          <p:cNvPr id="9" name="Slide Number Placeholder 8">
-            <a:extLst>
-              <a:ext uri="{FF2B5EF4-FFF2-40B4-BE49-F238E27FC236}">
-                <a16:creationId xmlns:a16="http://schemas.microsoft.com/office/drawing/2014/main" id="{A6C6B0A2-57CB-16B8-1E9B-CA6DA6337B35}"/>
-              </a:ext>
-            </a:extLst>
-          </p:cNvPr>
+          <p:cNvPr id="9" name="Slide Number Placeholder 8"/>
           <p:cNvSpPr>
             <a:spLocks noGrp="1"/>
           </p:cNvSpPr>
@@ -1923,7 +1704,7 @@
     </p:spTree>
     <p:extLst>
       <p:ext uri="{BB962C8B-B14F-4D97-AF65-F5344CB8AC3E}">
-        <p14:creationId xmlns:p14="http://schemas.microsoft.com/office/powerpoint/2010/main" val="3902579014"/>
+        <p14:creationId xmlns:p14="http://schemas.microsoft.com/office/powerpoint/2010/main" val="917192762"/>
       </p:ext>
     </p:extLst>
   </p:cSld>
@@ -1952,13 +1733,7 @@
       </p:grpSpPr>
       <p:sp>
         <p:nvSpPr>
-          <p:cNvPr id="2" name="Title 1">
-            <a:extLst>
-              <a:ext uri="{FF2B5EF4-FFF2-40B4-BE49-F238E27FC236}">
-                <a16:creationId xmlns:a16="http://schemas.microsoft.com/office/drawing/2014/main" id="{42014C2D-A9C6-E4FF-86E0-53926609620A}"/>
-              </a:ext>
-            </a:extLst>
-          </p:cNvPr>
+          <p:cNvPr id="2" name="Title 1"/>
           <p:cNvSpPr>
             <a:spLocks noGrp="1"/>
           </p:cNvSpPr>
@@ -1975,18 +1750,13 @@
               <a:rPr lang="en-US"/>
               <a:t>Click to edit Master title style</a:t>
             </a:r>
-          </a:p>
-        </p:txBody>
-      </p:sp>
-      <p:sp>
-        <p:nvSpPr>
-          <p:cNvPr id="3" name="Date Placeholder 2">
-            <a:extLst>
-              <a:ext uri="{FF2B5EF4-FFF2-40B4-BE49-F238E27FC236}">
-                <a16:creationId xmlns:a16="http://schemas.microsoft.com/office/drawing/2014/main" id="{CAEBDED3-8FA2-E14E-6132-DBF06C0043E9}"/>
-              </a:ext>
-            </a:extLst>
-          </p:cNvPr>
+            <a:endParaRPr lang="en-US" dirty="0"/>
+          </a:p>
+        </p:txBody>
+      </p:sp>
+      <p:sp>
+        <p:nvSpPr>
+          <p:cNvPr id="3" name="Date Placeholder 2"/>
           <p:cNvSpPr>
             <a:spLocks noGrp="1"/>
           </p:cNvSpPr>
@@ -2001,7 +1771,7 @@
           <a:p>
             <a:fld id="{E759A0DE-F190-5444-87AC-4719D5F20D15}" type="datetimeFigureOut">
               <a:rPr lang="en-US" smtClean="0"/>
-              <a:t>4/3/26</a:t>
+              <a:t>6/13/26</a:t>
             </a:fld>
             <a:endParaRPr lang="en-US"/>
           </a:p>
@@ -2009,13 +1779,7 @@
       </p:sp>
       <p:sp>
         <p:nvSpPr>
-          <p:cNvPr id="4" name="Footer Placeholder 3">
-            <a:extLst>
-              <a:ext uri="{FF2B5EF4-FFF2-40B4-BE49-F238E27FC236}">
-                <a16:creationId xmlns:a16="http://schemas.microsoft.com/office/drawing/2014/main" id="{24FF1715-78D0-6155-47B7-64F32ECF5F55}"/>
-              </a:ext>
-            </a:extLst>
-          </p:cNvPr>
+          <p:cNvPr id="4" name="Footer Placeholder 3"/>
           <p:cNvSpPr>
             <a:spLocks noGrp="1"/>
           </p:cNvSpPr>
@@ -2034,13 +1798,7 @@
       </p:sp>
       <p:sp>
         <p:nvSpPr>
-          <p:cNvPr id="5" name="Slide Number Placeholder 4">
-            <a:extLst>
-              <a:ext uri="{FF2B5EF4-FFF2-40B4-BE49-F238E27FC236}">
-                <a16:creationId xmlns:a16="http://schemas.microsoft.com/office/drawing/2014/main" id="{95EE70D1-30EB-D2A6-F6C0-29E5A0681277}"/>
-              </a:ext>
-            </a:extLst>
-          </p:cNvPr>
+          <p:cNvPr id="5" name="Slide Number Placeholder 4"/>
           <p:cNvSpPr>
             <a:spLocks noGrp="1"/>
           </p:cNvSpPr>
@@ -2064,7 +1822,7 @@
     </p:spTree>
     <p:extLst>
       <p:ext uri="{BB962C8B-B14F-4D97-AF65-F5344CB8AC3E}">
-        <p14:creationId xmlns:p14="http://schemas.microsoft.com/office/powerpoint/2010/main" val="2762667879"/>
+        <p14:creationId xmlns:p14="http://schemas.microsoft.com/office/powerpoint/2010/main" val="3718008137"/>
       </p:ext>
     </p:extLst>
   </p:cSld>
@@ -2093,13 +1851,7 @@
       </p:grpSpPr>
       <p:sp>
         <p:nvSpPr>
-          <p:cNvPr id="2" name="Date Placeholder 1">
-            <a:extLst>
-              <a:ext uri="{FF2B5EF4-FFF2-40B4-BE49-F238E27FC236}">
-                <a16:creationId xmlns:a16="http://schemas.microsoft.com/office/drawing/2014/main" id="{9CD2DAB5-6AD5-15BC-026B-B80E34678399}"/>
-              </a:ext>
-            </a:extLst>
-          </p:cNvPr>
+          <p:cNvPr id="2" name="Date Placeholder 1"/>
           <p:cNvSpPr>
             <a:spLocks noGrp="1"/>
           </p:cNvSpPr>
@@ -2114,7 +1866,7 @@
           <a:p>
             <a:fld id="{E759A0DE-F190-5444-87AC-4719D5F20D15}" type="datetimeFigureOut">
               <a:rPr lang="en-US" smtClean="0"/>
-              <a:t>4/3/26</a:t>
+              <a:t>6/13/26</a:t>
             </a:fld>
             <a:endParaRPr lang="en-US"/>
           </a:p>
@@ -2122,13 +1874,7 @@
       </p:sp>
       <p:sp>
         <p:nvSpPr>
-          <p:cNvPr id="3" name="Footer Placeholder 2">
-            <a:extLst>
-              <a:ext uri="{FF2B5EF4-FFF2-40B4-BE49-F238E27FC236}">
-                <a16:creationId xmlns:a16="http://schemas.microsoft.com/office/drawing/2014/main" id="{919D2783-D2E4-47AE-70D6-B4A209E13CBC}"/>
-              </a:ext>
-            </a:extLst>
-          </p:cNvPr>
+          <p:cNvPr id="3" name="Footer Placeholder 2"/>
           <p:cNvSpPr>
             <a:spLocks noGrp="1"/>
           </p:cNvSpPr>
@@ -2147,13 +1893,7 @@
       </p:sp>
       <p:sp>
         <p:nvSpPr>
-          <p:cNvPr id="4" name="Slide Number Placeholder 3">
-            <a:extLst>
-              <a:ext uri="{FF2B5EF4-FFF2-40B4-BE49-F238E27FC236}">
-                <a16:creationId xmlns:a16="http://schemas.microsoft.com/office/drawing/2014/main" id="{009A41F5-9D51-17BE-FB49-C0DC79F1FB33}"/>
-              </a:ext>
-            </a:extLst>
-          </p:cNvPr>
+          <p:cNvPr id="4" name="Slide Number Placeholder 3"/>
           <p:cNvSpPr>
             <a:spLocks noGrp="1"/>
           </p:cNvSpPr>
@@ -2177,7 +1917,7 @@
     </p:spTree>
     <p:extLst>
       <p:ext uri="{BB962C8B-B14F-4D97-AF65-F5344CB8AC3E}">
-        <p14:creationId xmlns:p14="http://schemas.microsoft.com/office/powerpoint/2010/main" val="684399818"/>
+        <p14:creationId xmlns:p14="http://schemas.microsoft.com/office/powerpoint/2010/main" val="793164442"/>
       </p:ext>
     </p:extLst>
   </p:cSld>
@@ -2206,13 +1946,7 @@
       </p:grpSpPr>
       <p:sp>
         <p:nvSpPr>
-          <p:cNvPr id="2" name="Title 1">
-            <a:extLst>
-              <a:ext uri="{FF2B5EF4-FFF2-40B4-BE49-F238E27FC236}">
-                <a16:creationId xmlns:a16="http://schemas.microsoft.com/office/drawing/2014/main" id="{636535ED-82D6-0936-3EEB-AD9435F5EDC9}"/>
-              </a:ext>
-            </a:extLst>
-          </p:cNvPr>
+          <p:cNvPr id="2" name="Title 1"/>
           <p:cNvSpPr>
             <a:spLocks noGrp="1"/>
           </p:cNvSpPr>
@@ -2222,8 +1956,8 @@
         </p:nvSpPr>
         <p:spPr>
           <a:xfrm>
-            <a:off x="839788" y="457200"/>
-            <a:ext cx="3932237" cy="1600200"/>
+            <a:off x="629841" y="457200"/>
+            <a:ext cx="2949178" cy="1600200"/>
           </a:xfrm>
         </p:spPr>
         <p:txBody>
@@ -2238,18 +1972,13 @@
               <a:rPr lang="en-US"/>
               <a:t>Click to edit Master title style</a:t>
             </a:r>
-          </a:p>
-        </p:txBody>
-      </p:sp>
-      <p:sp>
-        <p:nvSpPr>
-          <p:cNvPr id="3" name="Content Placeholder 2">
-            <a:extLst>
-              <a:ext uri="{FF2B5EF4-FFF2-40B4-BE49-F238E27FC236}">
-                <a16:creationId xmlns:a16="http://schemas.microsoft.com/office/drawing/2014/main" id="{1803B2A4-A7AB-CDB0-D7F1-279536A2702A}"/>
-              </a:ext>
-            </a:extLst>
-          </p:cNvPr>
+            <a:endParaRPr lang="en-US" dirty="0"/>
+          </a:p>
+        </p:txBody>
+      </p:sp>
+      <p:sp>
+        <p:nvSpPr>
+          <p:cNvPr id="3" name="Content Placeholder 2"/>
           <p:cNvSpPr>
             <a:spLocks noGrp="1"/>
           </p:cNvSpPr>
@@ -2259,8 +1988,8 @@
         </p:nvSpPr>
         <p:spPr>
           <a:xfrm>
-            <a:off x="5183188" y="987425"/>
-            <a:ext cx="6172200" cy="4873625"/>
+            <a:off x="3887391" y="987426"/>
+            <a:ext cx="4629150" cy="4873625"/>
           </a:xfrm>
         </p:spPr>
         <p:txBody>
@@ -2328,18 +2057,13 @@
               <a:rPr lang="en-US"/>
               <a:t>Fifth level</a:t>
             </a:r>
-          </a:p>
-        </p:txBody>
-      </p:sp>
-      <p:sp>
-        <p:nvSpPr>
-          <p:cNvPr id="4" name="Text Placeholder 3">
-            <a:extLst>
-              <a:ext uri="{FF2B5EF4-FFF2-40B4-BE49-F238E27FC236}">
-                <a16:creationId xmlns:a16="http://schemas.microsoft.com/office/drawing/2014/main" id="{3329566A-3ACC-2A16-1AAE-6B0281DB7E3C}"/>
-              </a:ext>
-            </a:extLst>
-          </p:cNvPr>
+            <a:endParaRPr lang="en-US" dirty="0"/>
+          </a:p>
+        </p:txBody>
+      </p:sp>
+      <p:sp>
+        <p:nvSpPr>
+          <p:cNvPr id="4" name="Text Placeholder 3"/>
           <p:cNvSpPr>
             <a:spLocks noGrp="1"/>
           </p:cNvSpPr>
@@ -2349,8 +2073,8 @@
         </p:nvSpPr>
         <p:spPr>
           <a:xfrm>
-            <a:off x="839788" y="2057400"/>
-            <a:ext cx="3932237" cy="3811588"/>
+            <a:off x="629841" y="2057400"/>
+            <a:ext cx="2949178" cy="3811588"/>
           </a:xfrm>
         </p:spPr>
         <p:txBody>
@@ -2404,13 +2128,7 @@
       </p:sp>
       <p:sp>
         <p:nvSpPr>
-          <p:cNvPr id="5" name="Date Placeholder 4">
-            <a:extLst>
-              <a:ext uri="{FF2B5EF4-FFF2-40B4-BE49-F238E27FC236}">
-                <a16:creationId xmlns:a16="http://schemas.microsoft.com/office/drawing/2014/main" id="{453518F2-2B74-8F2D-171A-15986F3C5152}"/>
-              </a:ext>
-            </a:extLst>
-          </p:cNvPr>
+          <p:cNvPr id="5" name="Date Placeholder 4"/>
           <p:cNvSpPr>
             <a:spLocks noGrp="1"/>
           </p:cNvSpPr>
@@ -2425,7 +2143,7 @@
           <a:p>
             <a:fld id="{E759A0DE-F190-5444-87AC-4719D5F20D15}" type="datetimeFigureOut">
               <a:rPr lang="en-US" smtClean="0"/>
-              <a:t>4/3/26</a:t>
+              <a:t>6/13/26</a:t>
             </a:fld>
             <a:endParaRPr lang="en-US"/>
           </a:p>
@@ -2433,13 +2151,7 @@
       </p:sp>
       <p:sp>
         <p:nvSpPr>
-          <p:cNvPr id="6" name="Footer Placeholder 5">
-            <a:extLst>
-              <a:ext uri="{FF2B5EF4-FFF2-40B4-BE49-F238E27FC236}">
-                <a16:creationId xmlns:a16="http://schemas.microsoft.com/office/drawing/2014/main" id="{6DF8701B-4899-C3D0-CB2F-6C31378A510F}"/>
-              </a:ext>
-            </a:extLst>
-          </p:cNvPr>
+          <p:cNvPr id="6" name="Footer Placeholder 5"/>
           <p:cNvSpPr>
             <a:spLocks noGrp="1"/>
           </p:cNvSpPr>
@@ -2458,13 +2170,7 @@
       </p:sp>
       <p:sp>
         <p:nvSpPr>
-          <p:cNvPr id="7" name="Slide Number Placeholder 6">
-            <a:extLst>
-              <a:ext uri="{FF2B5EF4-FFF2-40B4-BE49-F238E27FC236}">
-                <a16:creationId xmlns:a16="http://schemas.microsoft.com/office/drawing/2014/main" id="{F3240FD0-A8F8-EFCD-2A69-21AB0FB076F6}"/>
-              </a:ext>
-            </a:extLst>
-          </p:cNvPr>
+          <p:cNvPr id="7" name="Slide Number Placeholder 6"/>
           <p:cNvSpPr>
             <a:spLocks noGrp="1"/>
           </p:cNvSpPr>
@@ -2488,7 +2194,7 @@
     </p:spTree>
     <p:extLst>
       <p:ext uri="{BB962C8B-B14F-4D97-AF65-F5344CB8AC3E}">
-        <p14:creationId xmlns:p14="http://schemas.microsoft.com/office/powerpoint/2010/main" val="2191778824"/>
+        <p14:creationId xmlns:p14="http://schemas.microsoft.com/office/powerpoint/2010/main" val="1297162517"/>
       </p:ext>
     </p:extLst>
   </p:cSld>
@@ -2517,13 +2223,7 @@
       </p:grpSpPr>
       <p:sp>
         <p:nvSpPr>
-          <p:cNvPr id="2" name="Title 1">
-            <a:extLst>
-              <a:ext uri="{FF2B5EF4-FFF2-40B4-BE49-F238E27FC236}">
-                <a16:creationId xmlns:a16="http://schemas.microsoft.com/office/drawing/2014/main" id="{FD43467F-CDAF-BF3C-2E6D-F2EBB52C7E17}"/>
-              </a:ext>
-            </a:extLst>
-          </p:cNvPr>
+          <p:cNvPr id="2" name="Title 1"/>
           <p:cNvSpPr>
             <a:spLocks noGrp="1"/>
           </p:cNvSpPr>
@@ -2533,8 +2233,8 @@
         </p:nvSpPr>
         <p:spPr>
           <a:xfrm>
-            <a:off x="839788" y="457200"/>
-            <a:ext cx="3932237" cy="1600200"/>
+            <a:off x="629841" y="457200"/>
+            <a:ext cx="2949178" cy="1600200"/>
           </a:xfrm>
         </p:spPr>
         <p:txBody>
@@ -2549,20 +2249,15 @@
               <a:rPr lang="en-US"/>
               <a:t>Click to edit Master title style</a:t>
             </a:r>
-          </a:p>
-        </p:txBody>
-      </p:sp>
-      <p:sp>
-        <p:nvSpPr>
-          <p:cNvPr id="3" name="Picture Placeholder 2">
-            <a:extLst>
-              <a:ext uri="{FF2B5EF4-FFF2-40B4-BE49-F238E27FC236}">
-                <a16:creationId xmlns:a16="http://schemas.microsoft.com/office/drawing/2014/main" id="{63D374E6-7653-1FED-90D8-27F8F5A5A555}"/>
-              </a:ext>
-            </a:extLst>
-          </p:cNvPr>
-          <p:cNvSpPr>
-            <a:spLocks noGrp="1"/>
+            <a:endParaRPr lang="en-US" dirty="0"/>
+          </a:p>
+        </p:txBody>
+      </p:sp>
+      <p:sp>
+        <p:nvSpPr>
+          <p:cNvPr id="3" name="Picture Placeholder 2"/>
+          <p:cNvSpPr>
+            <a:spLocks noGrp="1" noChangeAspect="1"/>
           </p:cNvSpPr>
           <p:nvPr>
             <p:ph type="pic" idx="1"/>
@@ -2570,12 +2265,12 @@
         </p:nvSpPr>
         <p:spPr>
           <a:xfrm>
-            <a:off x="5183188" y="987425"/>
-            <a:ext cx="6172200" cy="4873625"/>
+            <a:off x="3887391" y="987426"/>
+            <a:ext cx="4629150" cy="4873625"/>
           </a:xfrm>
         </p:spPr>
         <p:txBody>
-          <a:bodyPr/>
+          <a:bodyPr anchor="t"/>
           <a:lstStyle>
             <a:lvl1pPr marL="0" indent="0">
               <a:buNone/>
@@ -2615,19 +2310,17 @@
             </a:lvl9pPr>
           </a:lstStyle>
           <a:p>
-            <a:endParaRPr lang="en-US"/>
-          </a:p>
-        </p:txBody>
-      </p:sp>
-      <p:sp>
-        <p:nvSpPr>
-          <p:cNvPr id="4" name="Text Placeholder 3">
-            <a:extLst>
-              <a:ext uri="{FF2B5EF4-FFF2-40B4-BE49-F238E27FC236}">
-                <a16:creationId xmlns:a16="http://schemas.microsoft.com/office/drawing/2014/main" id="{9318631D-B68A-86EE-A551-F2FE300250A2}"/>
-              </a:ext>
-            </a:extLst>
-          </p:cNvPr>
+            <a:r>
+              <a:rPr lang="en-US"/>
+              <a:t>Click icon to add picture</a:t>
+            </a:r>
+            <a:endParaRPr lang="en-US" dirty="0"/>
+          </a:p>
+        </p:txBody>
+      </p:sp>
+      <p:sp>
+        <p:nvSpPr>
+          <p:cNvPr id="4" name="Text Placeholder 3"/>
           <p:cNvSpPr>
             <a:spLocks noGrp="1"/>
           </p:cNvSpPr>
@@ -2637,8 +2330,8 @@
         </p:nvSpPr>
         <p:spPr>
           <a:xfrm>
-            <a:off x="839788" y="2057400"/>
-            <a:ext cx="3932237" cy="3811588"/>
+            <a:off x="629841" y="2057400"/>
+            <a:ext cx="2949178" cy="3811588"/>
           </a:xfrm>
         </p:spPr>
         <p:txBody>
@@ -2692,13 +2385,7 @@
       </p:sp>
       <p:sp>
         <p:nvSpPr>
-          <p:cNvPr id="5" name="Date Placeholder 4">
-            <a:extLst>
-              <a:ext uri="{FF2B5EF4-FFF2-40B4-BE49-F238E27FC236}">
-                <a16:creationId xmlns:a16="http://schemas.microsoft.com/office/drawing/2014/main" id="{0CAD5574-CD0C-0EDC-7EA2-BBDDAA07AD36}"/>
-              </a:ext>
-            </a:extLst>
-          </p:cNvPr>
+          <p:cNvPr id="5" name="Date Placeholder 4"/>
           <p:cNvSpPr>
             <a:spLocks noGrp="1"/>
           </p:cNvSpPr>
@@ -2713,7 +2400,7 @@
           <a:p>
             <a:fld id="{E759A0DE-F190-5444-87AC-4719D5F20D15}" type="datetimeFigureOut">
               <a:rPr lang="en-US" smtClean="0"/>
-              <a:t>4/3/26</a:t>
+              <a:t>6/13/26</a:t>
             </a:fld>
             <a:endParaRPr lang="en-US"/>
           </a:p>
@@ -2721,13 +2408,7 @@
       </p:sp>
       <p:sp>
         <p:nvSpPr>
-          <p:cNvPr id="6" name="Footer Placeholder 5">
-            <a:extLst>
-              <a:ext uri="{FF2B5EF4-FFF2-40B4-BE49-F238E27FC236}">
-                <a16:creationId xmlns:a16="http://schemas.microsoft.com/office/drawing/2014/main" id="{C4ADA4F2-15B1-95FF-AFC8-0BCFB4E4E788}"/>
-              </a:ext>
-            </a:extLst>
-          </p:cNvPr>
+          <p:cNvPr id="6" name="Footer Placeholder 5"/>
           <p:cNvSpPr>
             <a:spLocks noGrp="1"/>
           </p:cNvSpPr>
@@ -2746,13 +2427,7 @@
       </p:sp>
       <p:sp>
         <p:nvSpPr>
-          <p:cNvPr id="7" name="Slide Number Placeholder 6">
-            <a:extLst>
-              <a:ext uri="{FF2B5EF4-FFF2-40B4-BE49-F238E27FC236}">
-                <a16:creationId xmlns:a16="http://schemas.microsoft.com/office/drawing/2014/main" id="{5F57356D-53C5-30FE-E0FE-A480BE6A8E8C}"/>
-              </a:ext>
-            </a:extLst>
-          </p:cNvPr>
+          <p:cNvPr id="7" name="Slide Number Placeholder 6"/>
           <p:cNvSpPr>
             <a:spLocks noGrp="1"/>
           </p:cNvSpPr>
@@ -2776,7 +2451,7 @@
     </p:spTree>
     <p:extLst>
       <p:ext uri="{BB962C8B-B14F-4D97-AF65-F5344CB8AC3E}">
-        <p14:creationId xmlns:p14="http://schemas.microsoft.com/office/powerpoint/2010/main" val="3139710704"/>
+        <p14:creationId xmlns:p14="http://schemas.microsoft.com/office/powerpoint/2010/main" val="2507651836"/>
       </p:ext>
     </p:extLst>
   </p:cSld>
@@ -2810,13 +2485,7 @@
       </p:grpSpPr>
       <p:sp>
         <p:nvSpPr>
-          <p:cNvPr id="2" name="Title Placeholder 1">
-            <a:extLst>
-              <a:ext uri="{FF2B5EF4-FFF2-40B4-BE49-F238E27FC236}">
-                <a16:creationId xmlns:a16="http://schemas.microsoft.com/office/drawing/2014/main" id="{E707FE23-AD5C-E492-4625-B3FFD7D65D58}"/>
-              </a:ext>
-            </a:extLst>
-          </p:cNvPr>
+          <p:cNvPr id="2" name="Title Placeholder 1"/>
           <p:cNvSpPr>
             <a:spLocks noGrp="1"/>
           </p:cNvSpPr>
@@ -2826,8 +2495,8 @@
         </p:nvSpPr>
         <p:spPr>
           <a:xfrm>
-            <a:off x="838200" y="365125"/>
-            <a:ext cx="10515600" cy="1325563"/>
+            <a:off x="628650" y="365126"/>
+            <a:ext cx="7886700" cy="1325563"/>
           </a:xfrm>
           <a:prstGeom prst="rect">
             <a:avLst/>
@@ -2843,18 +2512,13 @@
               <a:rPr lang="en-US"/>
               <a:t>Click to edit Master title style</a:t>
             </a:r>
-          </a:p>
-        </p:txBody>
-      </p:sp>
-      <p:sp>
-        <p:nvSpPr>
-          <p:cNvPr id="3" name="Text Placeholder 2">
-            <a:extLst>
-              <a:ext uri="{FF2B5EF4-FFF2-40B4-BE49-F238E27FC236}">
-                <a16:creationId xmlns:a16="http://schemas.microsoft.com/office/drawing/2014/main" id="{5935509A-545F-6691-9119-47A073D0143B}"/>
-              </a:ext>
-            </a:extLst>
-          </p:cNvPr>
+            <a:endParaRPr lang="en-US" dirty="0"/>
+          </a:p>
+        </p:txBody>
+      </p:sp>
+      <p:sp>
+        <p:nvSpPr>
+          <p:cNvPr id="3" name="Text Placeholder 2"/>
           <p:cNvSpPr>
             <a:spLocks noGrp="1"/>
           </p:cNvSpPr>
@@ -2864,8 +2528,8 @@
         </p:nvSpPr>
         <p:spPr>
           <a:xfrm>
-            <a:off x="838200" y="1825625"/>
-            <a:ext cx="10515600" cy="4351338"/>
+            <a:off x="628650" y="1825625"/>
+            <a:ext cx="7886700" cy="4351338"/>
           </a:xfrm>
           <a:prstGeom prst="rect">
             <a:avLst/>
@@ -2910,18 +2574,13 @@
               <a:rPr lang="en-US"/>
               <a:t>Fifth level</a:t>
             </a:r>
-          </a:p>
-        </p:txBody>
-      </p:sp>
-      <p:sp>
-        <p:nvSpPr>
-          <p:cNvPr id="4" name="Date Placeholder 3">
-            <a:extLst>
-              <a:ext uri="{FF2B5EF4-FFF2-40B4-BE49-F238E27FC236}">
-                <a16:creationId xmlns:a16="http://schemas.microsoft.com/office/drawing/2014/main" id="{B48FCAAE-1AD5-9CBF-A0F6-52A814732FD0}"/>
-              </a:ext>
-            </a:extLst>
-          </p:cNvPr>
+            <a:endParaRPr lang="en-US" dirty="0"/>
+          </a:p>
+        </p:txBody>
+      </p:sp>
+      <p:sp>
+        <p:nvSpPr>
+          <p:cNvPr id="4" name="Date Placeholder 3"/>
           <p:cNvSpPr>
             <a:spLocks noGrp="1"/>
           </p:cNvSpPr>
@@ -2931,8 +2590,8 @@
         </p:nvSpPr>
         <p:spPr>
           <a:xfrm>
-            <a:off x="838200" y="6356350"/>
-            <a:ext cx="2743200" cy="365125"/>
+            <a:off x="628650" y="6356351"/>
+            <a:ext cx="2057400" cy="365125"/>
           </a:xfrm>
           <a:prstGeom prst="rect">
             <a:avLst/>
@@ -2954,7 +2613,7 @@
           <a:p>
             <a:fld id="{E759A0DE-F190-5444-87AC-4719D5F20D15}" type="datetimeFigureOut">
               <a:rPr lang="en-US" smtClean="0"/>
-              <a:t>4/3/26</a:t>
+              <a:t>6/13/26</a:t>
             </a:fld>
             <a:endParaRPr lang="en-US"/>
           </a:p>
@@ -2962,13 +2621,7 @@
       </p:sp>
       <p:sp>
         <p:nvSpPr>
-          <p:cNvPr id="5" name="Footer Placeholder 4">
-            <a:extLst>
-              <a:ext uri="{FF2B5EF4-FFF2-40B4-BE49-F238E27FC236}">
-                <a16:creationId xmlns:a16="http://schemas.microsoft.com/office/drawing/2014/main" id="{22229717-0F21-BE11-1F19-88106B640856}"/>
-              </a:ext>
-            </a:extLst>
-          </p:cNvPr>
+          <p:cNvPr id="5" name="Footer Placeholder 4"/>
           <p:cNvSpPr>
             <a:spLocks noGrp="1"/>
           </p:cNvSpPr>
@@ -2978,8 +2631,8 @@
         </p:nvSpPr>
         <p:spPr>
           <a:xfrm>
-            <a:off x="4038600" y="6356350"/>
-            <a:ext cx="4114800" cy="365125"/>
+            <a:off x="3028950" y="6356351"/>
+            <a:ext cx="3086100" cy="365125"/>
           </a:xfrm>
           <a:prstGeom prst="rect">
             <a:avLst/>
@@ -3005,13 +2658,7 @@
       </p:sp>
       <p:sp>
         <p:nvSpPr>
-          <p:cNvPr id="6" name="Slide Number Placeholder 5">
-            <a:extLst>
-              <a:ext uri="{FF2B5EF4-FFF2-40B4-BE49-F238E27FC236}">
-                <a16:creationId xmlns:a16="http://schemas.microsoft.com/office/drawing/2014/main" id="{3858A247-FF8D-F68A-7E74-66F74B44BB8E}"/>
-              </a:ext>
-            </a:extLst>
-          </p:cNvPr>
+          <p:cNvPr id="6" name="Slide Number Placeholder 5"/>
           <p:cNvSpPr>
             <a:spLocks noGrp="1"/>
           </p:cNvSpPr>
@@ -3021,8 +2668,8 @@
         </p:nvSpPr>
         <p:spPr>
           <a:xfrm>
-            <a:off x="8610600" y="6356350"/>
-            <a:ext cx="2743200" cy="365125"/>
+            <a:off x="6457950" y="6356351"/>
+            <a:ext cx="2057400" cy="365125"/>
           </a:xfrm>
           <a:prstGeom prst="rect">
             <a:avLst/>
@@ -3053,23 +2700,23 @@
     </p:spTree>
     <p:extLst>
       <p:ext uri="{BB962C8B-B14F-4D97-AF65-F5344CB8AC3E}">
-        <p14:creationId xmlns:p14="http://schemas.microsoft.com/office/powerpoint/2010/main" val="3785378211"/>
+        <p14:creationId xmlns:p14="http://schemas.microsoft.com/office/powerpoint/2010/main" val="2836750373"/>
       </p:ext>
     </p:extLst>
   </p:cSld>
   <p:clrMap bg1="lt1" tx1="dk1" bg2="lt2" tx2="dk2" accent1="accent1" accent2="accent2" accent3="accent3" accent4="accent4" accent5="accent5" accent6="accent6" hlink="hlink" folHlink="folHlink"/>
   <p:sldLayoutIdLst>
-    <p:sldLayoutId id="2147483649" r:id="rId1"/>
-    <p:sldLayoutId id="2147483650" r:id="rId2"/>
-    <p:sldLayoutId id="2147483651" r:id="rId3"/>
-    <p:sldLayoutId id="2147483652" r:id="rId4"/>
-    <p:sldLayoutId id="2147483653" r:id="rId5"/>
-    <p:sldLayoutId id="2147483654" r:id="rId6"/>
-    <p:sldLayoutId id="2147483655" r:id="rId7"/>
-    <p:sldLayoutId id="2147483656" r:id="rId8"/>
-    <p:sldLayoutId id="2147483657" r:id="rId9"/>
-    <p:sldLayoutId id="2147483658" r:id="rId10"/>
-    <p:sldLayoutId id="2147483659" r:id="rId11"/>
+    <p:sldLayoutId id="2147483661" r:id="rId1"/>
+    <p:sldLayoutId id="2147483662" r:id="rId2"/>
+    <p:sldLayoutId id="2147483663" r:id="rId3"/>
+    <p:sldLayoutId id="2147483664" r:id="rId4"/>
+    <p:sldLayoutId id="2147483665" r:id="rId5"/>
+    <p:sldLayoutId id="2147483666" r:id="rId6"/>
+    <p:sldLayoutId id="2147483667" r:id="rId7"/>
+    <p:sldLayoutId id="2147483668" r:id="rId8"/>
+    <p:sldLayoutId id="2147483669" r:id="rId9"/>
+    <p:sldLayoutId id="2147483670" r:id="rId10"/>
+    <p:sldLayoutId id="2147483671" r:id="rId11"/>
   </p:sldLayoutIdLst>
   <p:txStyles>
     <p:titleStyle>
@@ -3403,8 +3050,8 @@
         </p:nvSpPr>
         <p:spPr>
           <a:xfrm>
-            <a:off x="838199" y="365125"/>
-            <a:ext cx="11146971" cy="1325563"/>
+            <a:off x="628650" y="1131094"/>
+            <a:ext cx="8360228" cy="994172"/>
           </a:xfrm>
         </p:spPr>
         <p:txBody>
@@ -3414,7 +3061,7 @@
           <a:lstStyle/>
           <a:p>
             <a:r>
-              <a:rPr lang="en-US" sz="5400" i="1" dirty="0">
+              <a:rPr lang="en-US" sz="4050" i="1" dirty="0">
                 <a:solidFill>
                   <a:schemeClr val="bg1"/>
                 </a:solidFill>
@@ -3487,7 +3134,7 @@
           <a:lstStyle/>
           <a:p>
             <a:r>
-              <a:rPr lang="en-US" sz="5400" i="1" dirty="0">
+              <a:rPr lang="en-US" sz="4050" i="1" dirty="0">
                 <a:solidFill>
                   <a:schemeClr val="bg1"/>
                 </a:solidFill>
@@ -3560,8 +3207,8 @@
         </p:nvSpPr>
         <p:spPr>
           <a:xfrm>
-            <a:off x="682831" y="497702"/>
-            <a:ext cx="10826338" cy="5862596"/>
+            <a:off x="512123" y="1230527"/>
+            <a:ext cx="8119754" cy="4396947"/>
           </a:xfrm>
         </p:spPr>
         <p:txBody>
@@ -3570,7 +3217,7 @@
           </a:bodyPr>
           <a:lstStyle/>
           <a:p>
-            <a:endParaRPr lang="en-US" sz="4800" dirty="0">
+            <a:endParaRPr lang="en-US" sz="3600" dirty="0">
               <a:solidFill>
                 <a:schemeClr val="bg1"/>
               </a:solidFill>
@@ -3579,7 +3226,7 @@
             </a:endParaRPr>
           </a:p>
           <a:p>
-            <a:endParaRPr lang="en-US" sz="4800" dirty="0">
+            <a:endParaRPr lang="en-US" sz="3600" dirty="0">
               <a:solidFill>
                 <a:schemeClr val="bg1"/>
               </a:solidFill>
@@ -3589,7 +3236,7 @@
           </a:p>
           <a:p>
             <a:r>
-              <a:rPr lang="en-US" sz="4800" dirty="0">
+              <a:rPr lang="en-US" sz="3600" dirty="0">
                 <a:solidFill>
                   <a:schemeClr val="bg1"/>
                 </a:solidFill>
@@ -3601,7 +3248,7 @@
           </a:p>
           <a:p>
             <a:r>
-              <a:rPr lang="en-US" sz="4800" dirty="0">
+              <a:rPr lang="en-US" sz="3600" dirty="0">
                 <a:solidFill>
                   <a:schemeClr val="bg1"/>
                 </a:solidFill>
@@ -3613,7 +3260,7 @@
           </a:p>
           <a:p>
             <a:r>
-              <a:rPr lang="en-US" sz="4800" dirty="0">
+              <a:rPr lang="en-US" sz="3600" dirty="0">
                 <a:solidFill>
                   <a:schemeClr val="bg1"/>
                 </a:solidFill>
@@ -3623,7 +3270,7 @@
               <a:t>The emblem of </a:t>
             </a:r>
             <a:r>
-              <a:rPr lang="en-US" sz="4800" dirty="0" err="1">
+              <a:rPr lang="en-US" sz="3600" dirty="0" err="1">
                 <a:solidFill>
                   <a:schemeClr val="bg1"/>
                 </a:solidFill>
@@ -3633,7 +3280,7 @@
               <a:t>suff’ring</a:t>
             </a:r>
             <a:r>
-              <a:rPr lang="en-US" sz="4800" dirty="0">
+              <a:rPr lang="en-US" sz="3600" dirty="0">
                 <a:solidFill>
                   <a:schemeClr val="bg1"/>
                 </a:solidFill>
@@ -3707,8 +3354,8 @@
         </p:nvSpPr>
         <p:spPr>
           <a:xfrm>
-            <a:off x="682831" y="497702"/>
-            <a:ext cx="10826338" cy="5862596"/>
+            <a:off x="512123" y="1230527"/>
+            <a:ext cx="8119754" cy="4396947"/>
           </a:xfrm>
         </p:spPr>
         <p:txBody>
@@ -3717,7 +3364,7 @@
           </a:bodyPr>
           <a:lstStyle/>
           <a:p>
-            <a:endParaRPr lang="en-US" sz="4800" dirty="0">
+            <a:endParaRPr lang="en-US" sz="3600" dirty="0">
               <a:solidFill>
                 <a:schemeClr val="bg1"/>
               </a:solidFill>
@@ -3726,7 +3373,7 @@
             </a:endParaRPr>
           </a:p>
           <a:p>
-            <a:endParaRPr lang="en-US" sz="4800" dirty="0">
+            <a:endParaRPr lang="en-US" sz="3600" dirty="0">
               <a:solidFill>
                 <a:schemeClr val="bg1"/>
               </a:solidFill>
@@ -3736,7 +3383,7 @@
           </a:p>
           <a:p>
             <a:r>
-              <a:rPr lang="en-US" sz="4800" dirty="0">
+              <a:rPr lang="en-US" sz="3600" dirty="0">
                 <a:solidFill>
                   <a:schemeClr val="bg1"/>
                 </a:solidFill>
@@ -3748,7 +3395,7 @@
           </a:p>
           <a:p>
             <a:r>
-              <a:rPr lang="en-US" sz="4800" dirty="0">
+              <a:rPr lang="en-US" sz="3600" dirty="0">
                 <a:solidFill>
                   <a:schemeClr val="bg1"/>
                 </a:solidFill>
@@ -3760,7 +3407,7 @@
           </a:p>
           <a:p>
             <a:r>
-              <a:rPr lang="en-US" sz="4800" dirty="0">
+              <a:rPr lang="en-US" sz="3600" dirty="0">
                 <a:solidFill>
                   <a:schemeClr val="bg1"/>
                 </a:solidFill>
@@ -3834,8 +3481,8 @@
         </p:nvSpPr>
         <p:spPr>
           <a:xfrm>
-            <a:off x="682831" y="497702"/>
-            <a:ext cx="10826338" cy="5862596"/>
+            <a:off x="512123" y="1230527"/>
+            <a:ext cx="8119754" cy="4396947"/>
           </a:xfrm>
         </p:spPr>
         <p:txBody>
@@ -3844,7 +3491,7 @@
           </a:bodyPr>
           <a:lstStyle/>
           <a:p>
-            <a:endParaRPr lang="en-US" sz="4800" dirty="0">
+            <a:endParaRPr lang="en-US" sz="3600" dirty="0">
               <a:solidFill>
                 <a:schemeClr val="bg1"/>
               </a:solidFill>
@@ -3853,7 +3500,7 @@
             </a:endParaRPr>
           </a:p>
           <a:p>
-            <a:endParaRPr lang="en-US" sz="4800" dirty="0">
+            <a:endParaRPr lang="en-US" sz="3600" dirty="0">
               <a:solidFill>
                 <a:schemeClr val="bg1"/>
               </a:solidFill>
@@ -3863,7 +3510,7 @@
           </a:p>
           <a:p>
             <a:r>
-              <a:rPr lang="en-US" sz="4800" dirty="0">
+              <a:rPr lang="en-US" sz="3600" dirty="0">
                 <a:solidFill>
                   <a:schemeClr val="bg1"/>
                 </a:solidFill>
@@ -3875,7 +3522,7 @@
           </a:p>
           <a:p>
             <a:r>
-              <a:rPr lang="en-US" sz="4800" dirty="0">
+              <a:rPr lang="en-US" sz="3600" dirty="0">
                 <a:solidFill>
                   <a:schemeClr val="bg1"/>
                 </a:solidFill>
@@ -3887,7 +3534,7 @@
           </a:p>
           <a:p>
             <a:r>
-              <a:rPr lang="en-US" sz="4800" dirty="0">
+              <a:rPr lang="en-US" sz="3600" dirty="0">
                 <a:solidFill>
                   <a:schemeClr val="bg1"/>
                 </a:solidFill>
@@ -3899,7 +3546,7 @@
           </a:p>
           <a:p>
             <a:r>
-              <a:rPr lang="en-US" sz="4800" dirty="0">
+              <a:rPr lang="en-US" sz="3600" dirty="0">
                 <a:solidFill>
                   <a:schemeClr val="bg1"/>
                 </a:solidFill>
@@ -3910,7 +3557,7 @@
             </a:r>
           </a:p>
           <a:p>
-            <a:endParaRPr lang="en-US" sz="4800" dirty="0">
+            <a:endParaRPr lang="en-US" sz="3600" dirty="0">
               <a:solidFill>
                 <a:schemeClr val="bg1"/>
               </a:solidFill>
@@ -3919,7 +3566,7 @@
             </a:endParaRPr>
           </a:p>
           <a:p>
-            <a:endParaRPr lang="en-US" sz="4800" dirty="0">
+            <a:endParaRPr lang="en-US" sz="3600" dirty="0">
               <a:solidFill>
                 <a:schemeClr val="bg1"/>
               </a:solidFill>
@@ -3991,8 +3638,8 @@
         </p:nvSpPr>
         <p:spPr>
           <a:xfrm>
-            <a:off x="682831" y="497702"/>
-            <a:ext cx="10826338" cy="5862596"/>
+            <a:off x="512123" y="1230527"/>
+            <a:ext cx="8119754" cy="4396947"/>
           </a:xfrm>
         </p:spPr>
         <p:txBody>
@@ -4001,7 +3648,7 @@
           </a:bodyPr>
           <a:lstStyle/>
           <a:p>
-            <a:endParaRPr lang="en-US" sz="4800" dirty="0">
+            <a:endParaRPr lang="en-US" sz="3600" dirty="0">
               <a:solidFill>
                 <a:schemeClr val="bg1"/>
               </a:solidFill>
@@ -4010,7 +3657,7 @@
             </a:endParaRPr>
           </a:p>
           <a:p>
-            <a:endParaRPr lang="en-US" sz="4800" dirty="0">
+            <a:endParaRPr lang="en-US" sz="3600" dirty="0">
               <a:solidFill>
                 <a:schemeClr val="bg1"/>
               </a:solidFill>
@@ -4020,7 +3667,7 @@
           </a:p>
           <a:p>
             <a:r>
-              <a:rPr lang="en-US" sz="4800" dirty="0">
+              <a:rPr lang="en-US" sz="3600" dirty="0">
                 <a:solidFill>
                   <a:schemeClr val="bg1"/>
                 </a:solidFill>
@@ -4032,7 +3679,7 @@
           </a:p>
           <a:p>
             <a:r>
-              <a:rPr lang="en-US" sz="4800" dirty="0">
+              <a:rPr lang="en-US" sz="3600" dirty="0">
                 <a:solidFill>
                   <a:schemeClr val="bg1"/>
                 </a:solidFill>
@@ -4044,7 +3691,7 @@
           </a:p>
           <a:p>
             <a:r>
-              <a:rPr lang="en-US" sz="4800" dirty="0">
+              <a:rPr lang="en-US" sz="3600" dirty="0">
                 <a:solidFill>
                   <a:schemeClr val="bg1"/>
                 </a:solidFill>
@@ -4118,8 +3765,8 @@
         </p:nvSpPr>
         <p:spPr>
           <a:xfrm>
-            <a:off x="682831" y="497702"/>
-            <a:ext cx="10826338" cy="5862596"/>
+            <a:off x="512123" y="1230527"/>
+            <a:ext cx="8119754" cy="4396947"/>
           </a:xfrm>
         </p:spPr>
         <p:txBody>
@@ -4128,7 +3775,7 @@
           </a:bodyPr>
           <a:lstStyle/>
           <a:p>
-            <a:endParaRPr lang="en-US" sz="4800" dirty="0">
+            <a:endParaRPr lang="en-US" sz="3600" dirty="0">
               <a:solidFill>
                 <a:schemeClr val="bg1"/>
               </a:solidFill>
@@ -4137,7 +3784,7 @@
             </a:endParaRPr>
           </a:p>
           <a:p>
-            <a:endParaRPr lang="en-US" sz="4800" dirty="0">
+            <a:endParaRPr lang="en-US" sz="3600" dirty="0">
               <a:solidFill>
                 <a:schemeClr val="bg1"/>
               </a:solidFill>
@@ -4147,7 +3794,7 @@
           </a:p>
           <a:p>
             <a:r>
-              <a:rPr lang="en-US" sz="4800" dirty="0">
+              <a:rPr lang="en-US" sz="3600" dirty="0">
                 <a:solidFill>
                   <a:schemeClr val="bg1"/>
                 </a:solidFill>
@@ -4159,7 +3806,7 @@
           </a:p>
           <a:p>
             <a:r>
-              <a:rPr lang="en-US" sz="4800" dirty="0">
+              <a:rPr lang="en-US" sz="3600" dirty="0">
                 <a:solidFill>
                   <a:schemeClr val="bg1"/>
                 </a:solidFill>
@@ -4171,7 +3818,7 @@
           </a:p>
           <a:p>
             <a:r>
-              <a:rPr lang="en-US" sz="4800" dirty="0">
+              <a:rPr lang="en-US" sz="3600" dirty="0">
                 <a:solidFill>
                   <a:schemeClr val="bg1"/>
                 </a:solidFill>
@@ -4245,8 +3892,8 @@
         </p:nvSpPr>
         <p:spPr>
           <a:xfrm>
-            <a:off x="682831" y="497702"/>
-            <a:ext cx="10826338" cy="5862596"/>
+            <a:off x="512123" y="1230527"/>
+            <a:ext cx="8119754" cy="4396947"/>
           </a:xfrm>
         </p:spPr>
         <p:txBody>
@@ -4255,7 +3902,7 @@
           </a:bodyPr>
           <a:lstStyle/>
           <a:p>
-            <a:endParaRPr lang="en-US" sz="4800" dirty="0">
+            <a:endParaRPr lang="en-US" sz="3600" dirty="0">
               <a:solidFill>
                 <a:schemeClr val="bg1"/>
               </a:solidFill>
@@ -4264,7 +3911,7 @@
             </a:endParaRPr>
           </a:p>
           <a:p>
-            <a:endParaRPr lang="en-US" sz="4800" dirty="0">
+            <a:endParaRPr lang="en-US" sz="3600" dirty="0">
               <a:solidFill>
                 <a:schemeClr val="bg1"/>
               </a:solidFill>
@@ -4274,7 +3921,7 @@
           </a:p>
           <a:p>
             <a:r>
-              <a:rPr lang="en-US" sz="4800" dirty="0">
+              <a:rPr lang="en-US" sz="3600" dirty="0">
                 <a:solidFill>
                   <a:schemeClr val="bg1"/>
                 </a:solidFill>
@@ -4286,7 +3933,7 @@
           </a:p>
           <a:p>
             <a:r>
-              <a:rPr lang="en-US" sz="4800" dirty="0">
+              <a:rPr lang="en-US" sz="3600" dirty="0">
                 <a:solidFill>
                   <a:schemeClr val="bg1"/>
                 </a:solidFill>
@@ -4298,7 +3945,7 @@
           </a:p>
           <a:p>
             <a:r>
-              <a:rPr lang="en-US" sz="4800" dirty="0">
+              <a:rPr lang="en-US" sz="3600" dirty="0">
                 <a:solidFill>
                   <a:schemeClr val="bg1"/>
                 </a:solidFill>
@@ -4310,7 +3957,7 @@
           </a:p>
           <a:p>
             <a:r>
-              <a:rPr lang="en-US" sz="4800" dirty="0">
+              <a:rPr lang="en-US" sz="3600" dirty="0">
                 <a:solidFill>
                   <a:schemeClr val="bg1"/>
                 </a:solidFill>
@@ -4321,7 +3968,7 @@
             </a:r>
           </a:p>
           <a:p>
-            <a:endParaRPr lang="en-US" sz="4800" dirty="0">
+            <a:endParaRPr lang="en-US" sz="3600" dirty="0">
               <a:solidFill>
                 <a:schemeClr val="bg1"/>
               </a:solidFill>
@@ -4330,7 +3977,7 @@
             </a:endParaRPr>
           </a:p>
           <a:p>
-            <a:endParaRPr lang="en-US" sz="4800" dirty="0">
+            <a:endParaRPr lang="en-US" sz="3600" dirty="0">
               <a:solidFill>
                 <a:schemeClr val="bg1"/>
               </a:solidFill>
@@ -4402,8 +4049,8 @@
         </p:nvSpPr>
         <p:spPr>
           <a:xfrm>
-            <a:off x="682831" y="497702"/>
-            <a:ext cx="10826338" cy="5862596"/>
+            <a:off x="512123" y="1230527"/>
+            <a:ext cx="8119754" cy="4396947"/>
           </a:xfrm>
         </p:spPr>
         <p:txBody>
@@ -4412,7 +4059,7 @@
           </a:bodyPr>
           <a:lstStyle/>
           <a:p>
-            <a:endParaRPr lang="en-US" sz="4800" dirty="0">
+            <a:endParaRPr lang="en-US" sz="3600" dirty="0">
               <a:solidFill>
                 <a:schemeClr val="bg1"/>
               </a:solidFill>
@@ -4421,7 +4068,7 @@
             </a:endParaRPr>
           </a:p>
           <a:p>
-            <a:endParaRPr lang="en-US" sz="4800" dirty="0">
+            <a:endParaRPr lang="en-US" sz="3600" dirty="0">
               <a:solidFill>
                 <a:schemeClr val="bg1"/>
               </a:solidFill>
@@ -4431,7 +4078,7 @@
           </a:p>
           <a:p>
             <a:r>
-              <a:rPr lang="en-US" sz="4800" dirty="0">
+              <a:rPr lang="en-US" sz="3600" dirty="0">
                 <a:solidFill>
                   <a:schemeClr val="bg1"/>
                 </a:solidFill>
@@ -4443,7 +4090,7 @@
           </a:p>
           <a:p>
             <a:r>
-              <a:rPr lang="en-US" sz="4800" dirty="0">
+              <a:rPr lang="en-US" sz="3600" dirty="0">
                 <a:solidFill>
                   <a:schemeClr val="bg1"/>
                 </a:solidFill>
@@ -4455,7 +4102,7 @@
           </a:p>
           <a:p>
             <a:r>
-              <a:rPr lang="en-US" sz="4800" dirty="0">
+              <a:rPr lang="en-US" sz="3600" dirty="0">
                 <a:solidFill>
                   <a:schemeClr val="bg1"/>
                 </a:solidFill>
@@ -4529,8 +4176,8 @@
         </p:nvSpPr>
         <p:spPr>
           <a:xfrm>
-            <a:off x="682831" y="497702"/>
-            <a:ext cx="10826338" cy="5862596"/>
+            <a:off x="512123" y="1230527"/>
+            <a:ext cx="8119754" cy="4396947"/>
           </a:xfrm>
         </p:spPr>
         <p:txBody>
@@ -4539,7 +4186,7 @@
           </a:bodyPr>
           <a:lstStyle/>
           <a:p>
-            <a:endParaRPr lang="en-US" sz="4800" dirty="0">
+            <a:endParaRPr lang="en-US" sz="3600" dirty="0">
               <a:solidFill>
                 <a:schemeClr val="bg1"/>
               </a:solidFill>
@@ -4548,7 +4195,7 @@
             </a:endParaRPr>
           </a:p>
           <a:p>
-            <a:endParaRPr lang="en-US" sz="4800" dirty="0">
+            <a:endParaRPr lang="en-US" sz="3600" dirty="0">
               <a:solidFill>
                 <a:schemeClr val="bg1"/>
               </a:solidFill>
@@ -4558,7 +4205,7 @@
           </a:p>
           <a:p>
             <a:r>
-              <a:rPr lang="en-US" sz="4800" dirty="0">
+              <a:rPr lang="en-US" sz="3600" dirty="0">
                 <a:solidFill>
                   <a:schemeClr val="bg1"/>
                 </a:solidFill>
@@ -4570,7 +4217,7 @@
           </a:p>
           <a:p>
             <a:r>
-              <a:rPr lang="en-US" sz="4800" dirty="0">
+              <a:rPr lang="en-US" sz="3600" dirty="0">
                 <a:solidFill>
                   <a:schemeClr val="bg1"/>
                 </a:solidFill>
@@ -4582,7 +4229,7 @@
           </a:p>
           <a:p>
             <a:r>
-              <a:rPr lang="en-US" sz="4800" dirty="0">
+              <a:rPr lang="en-US" sz="3600" dirty="0">
                 <a:solidFill>
                   <a:schemeClr val="bg1"/>
                 </a:solidFill>
@@ -4656,8 +4303,8 @@
         </p:nvSpPr>
         <p:spPr>
           <a:xfrm>
-            <a:off x="682831" y="497702"/>
-            <a:ext cx="10826338" cy="5862596"/>
+            <a:off x="512123" y="1230527"/>
+            <a:ext cx="8119754" cy="4396947"/>
           </a:xfrm>
         </p:spPr>
         <p:txBody>
@@ -4666,7 +4313,7 @@
           </a:bodyPr>
           <a:lstStyle/>
           <a:p>
-            <a:endParaRPr lang="en-US" sz="4800" dirty="0">
+            <a:endParaRPr lang="en-US" sz="3600" dirty="0">
               <a:solidFill>
                 <a:schemeClr val="bg1"/>
               </a:solidFill>
@@ -4675,7 +4322,7 @@
             </a:endParaRPr>
           </a:p>
           <a:p>
-            <a:endParaRPr lang="en-US" sz="4800" dirty="0">
+            <a:endParaRPr lang="en-US" sz="3600" dirty="0">
               <a:solidFill>
                 <a:schemeClr val="bg1"/>
               </a:solidFill>
@@ -4685,7 +4332,7 @@
           </a:p>
           <a:p>
             <a:r>
-              <a:rPr lang="en-US" sz="4800" dirty="0">
+              <a:rPr lang="en-US" sz="3600" dirty="0">
                 <a:solidFill>
                   <a:schemeClr val="bg1"/>
                 </a:solidFill>
@@ -4697,7 +4344,7 @@
           </a:p>
           <a:p>
             <a:r>
-              <a:rPr lang="en-US" sz="4800" dirty="0">
+              <a:rPr lang="en-US" sz="3600" dirty="0">
                 <a:solidFill>
                   <a:schemeClr val="bg1"/>
                 </a:solidFill>
@@ -4709,7 +4356,7 @@
           </a:p>
           <a:p>
             <a:r>
-              <a:rPr lang="en-US" sz="4800" dirty="0">
+              <a:rPr lang="en-US" sz="3600" dirty="0">
                 <a:solidFill>
                   <a:schemeClr val="bg1"/>
                 </a:solidFill>
@@ -4721,7 +4368,7 @@
           </a:p>
           <a:p>
             <a:r>
-              <a:rPr lang="en-US" sz="4800" dirty="0">
+              <a:rPr lang="en-US" sz="3600" dirty="0">
                 <a:solidFill>
                   <a:schemeClr val="bg1"/>
                 </a:solidFill>
@@ -4732,7 +4379,7 @@
             </a:r>
           </a:p>
           <a:p>
-            <a:endParaRPr lang="en-US" sz="4800" dirty="0">
+            <a:endParaRPr lang="en-US" sz="3600" dirty="0">
               <a:solidFill>
                 <a:schemeClr val="bg1"/>
               </a:solidFill>
@@ -4741,7 +4388,7 @@
             </a:endParaRPr>
           </a:p>
           <a:p>
-            <a:endParaRPr lang="en-US" sz="4800" dirty="0">
+            <a:endParaRPr lang="en-US" sz="3600" dirty="0">
               <a:solidFill>
                 <a:schemeClr val="bg1"/>
               </a:solidFill>
@@ -4813,8 +4460,8 @@
         </p:nvSpPr>
         <p:spPr>
           <a:xfrm>
-            <a:off x="682831" y="497702"/>
-            <a:ext cx="10826338" cy="5862596"/>
+            <a:off x="512123" y="1230527"/>
+            <a:ext cx="8119754" cy="4396947"/>
           </a:xfrm>
         </p:spPr>
         <p:txBody>
@@ -4823,7 +4470,7 @@
           </a:bodyPr>
           <a:lstStyle/>
           <a:p>
-            <a:endParaRPr lang="en-US" sz="4800" dirty="0">
+            <a:endParaRPr lang="en-US" sz="3600" dirty="0">
               <a:solidFill>
                 <a:schemeClr val="bg1"/>
               </a:solidFill>
@@ -4832,7 +4479,7 @@
             </a:endParaRPr>
           </a:p>
           <a:p>
-            <a:endParaRPr lang="en-US" sz="4800" dirty="0">
+            <a:endParaRPr lang="en-US" sz="3600" dirty="0">
               <a:solidFill>
                 <a:schemeClr val="bg1"/>
               </a:solidFill>
@@ -4842,7 +4489,7 @@
           </a:p>
           <a:p>
             <a:r>
-              <a:rPr lang="en-US" sz="4800" dirty="0">
+              <a:rPr lang="en-US" sz="3600" dirty="0">
                 <a:solidFill>
                   <a:schemeClr val="bg1"/>
                 </a:solidFill>
@@ -4854,7 +4501,7 @@
           </a:p>
           <a:p>
             <a:r>
-              <a:rPr lang="en-US" sz="4800" dirty="0">
+              <a:rPr lang="en-US" sz="3600" dirty="0">
                 <a:solidFill>
                   <a:schemeClr val="bg1"/>
                 </a:solidFill>
@@ -4866,7 +4513,7 @@
           </a:p>
           <a:p>
             <a:r>
-              <a:rPr lang="en-US" sz="4800" dirty="0">
+              <a:rPr lang="en-US" sz="3600" dirty="0">
                 <a:solidFill>
                   <a:schemeClr val="bg1"/>
                 </a:solidFill>
@@ -4946,7 +4593,7 @@
           <a:lstStyle/>
           <a:p>
             <a:r>
-              <a:rPr lang="en-US" sz="5400" i="1" dirty="0">
+              <a:rPr lang="en-US" sz="4050" i="1" dirty="0">
                 <a:solidFill>
                   <a:schemeClr val="bg1"/>
                 </a:solidFill>
@@ -5019,8 +4666,8 @@
         </p:nvSpPr>
         <p:spPr>
           <a:xfrm>
-            <a:off x="682831" y="497702"/>
-            <a:ext cx="10826338" cy="5862596"/>
+            <a:off x="512123" y="1230527"/>
+            <a:ext cx="8119754" cy="4396947"/>
           </a:xfrm>
         </p:spPr>
         <p:txBody>
@@ -5029,7 +4676,7 @@
           </a:bodyPr>
           <a:lstStyle/>
           <a:p>
-            <a:endParaRPr lang="en-US" sz="4800" dirty="0">
+            <a:endParaRPr lang="en-US" sz="3600" dirty="0">
               <a:solidFill>
                 <a:schemeClr val="bg1"/>
               </a:solidFill>
@@ -5038,7 +4685,7 @@
             </a:endParaRPr>
           </a:p>
           <a:p>
-            <a:endParaRPr lang="en-US" sz="4800" dirty="0">
+            <a:endParaRPr lang="en-US" sz="3600" dirty="0">
               <a:solidFill>
                 <a:schemeClr val="bg1"/>
               </a:solidFill>
@@ -5048,7 +4695,7 @@
           </a:p>
           <a:p>
             <a:r>
-              <a:rPr lang="en-US" sz="4800" dirty="0">
+              <a:rPr lang="en-US" sz="3600" dirty="0">
                 <a:solidFill>
                   <a:schemeClr val="bg1"/>
                 </a:solidFill>
@@ -5060,7 +4707,7 @@
           </a:p>
           <a:p>
             <a:r>
-              <a:rPr lang="en-US" sz="4800" dirty="0">
+              <a:rPr lang="en-US" sz="3600" dirty="0">
                 <a:solidFill>
                   <a:schemeClr val="bg1"/>
                 </a:solidFill>
@@ -5072,7 +4719,7 @@
           </a:p>
           <a:p>
             <a:r>
-              <a:rPr lang="en-US" sz="4800" dirty="0">
+              <a:rPr lang="en-US" sz="3600" dirty="0">
                 <a:solidFill>
                   <a:schemeClr val="bg1"/>
                 </a:solidFill>
@@ -5084,7 +4731,7 @@
           </a:p>
           <a:p>
             <a:r>
-              <a:rPr lang="en-US" sz="4800" dirty="0">
+              <a:rPr lang="en-US" sz="3600" dirty="0">
                 <a:solidFill>
                   <a:schemeClr val="bg1"/>
                 </a:solidFill>
@@ -5158,8 +4805,8 @@
         </p:nvSpPr>
         <p:spPr>
           <a:xfrm>
-            <a:off x="682831" y="497702"/>
-            <a:ext cx="10826338" cy="5862596"/>
+            <a:off x="512123" y="1230527"/>
+            <a:ext cx="8119754" cy="4396947"/>
           </a:xfrm>
         </p:spPr>
         <p:txBody>
@@ -5168,7 +4815,7 @@
           </a:bodyPr>
           <a:lstStyle/>
           <a:p>
-            <a:endParaRPr lang="en-US" sz="4800" dirty="0">
+            <a:endParaRPr lang="en-US" sz="3600" dirty="0">
               <a:solidFill>
                 <a:schemeClr val="bg1"/>
               </a:solidFill>
@@ -5177,7 +4824,7 @@
             </a:endParaRPr>
           </a:p>
           <a:p>
-            <a:endParaRPr lang="en-US" sz="4800" dirty="0">
+            <a:endParaRPr lang="en-US" sz="3600" dirty="0">
               <a:solidFill>
                 <a:schemeClr val="bg1"/>
               </a:solidFill>
@@ -5187,7 +4834,7 @@
           </a:p>
           <a:p>
             <a:r>
-              <a:rPr lang="en-US" sz="4800" dirty="0">
+              <a:rPr lang="en-US" sz="3600" dirty="0">
                 <a:solidFill>
                   <a:schemeClr val="bg1"/>
                 </a:solidFill>
@@ -5199,7 +4846,7 @@
           </a:p>
           <a:p>
             <a:r>
-              <a:rPr lang="en-US" sz="4800" dirty="0">
+              <a:rPr lang="en-US" sz="3600" dirty="0">
                 <a:solidFill>
                   <a:schemeClr val="bg1"/>
                 </a:solidFill>
@@ -5211,7 +4858,7 @@
           </a:p>
           <a:p>
             <a:r>
-              <a:rPr lang="en-US" sz="4800" dirty="0">
+              <a:rPr lang="en-US" sz="3600" dirty="0">
                 <a:solidFill>
                   <a:schemeClr val="bg1"/>
                 </a:solidFill>
@@ -5223,7 +4870,7 @@
           </a:p>
           <a:p>
             <a:r>
-              <a:rPr lang="en-US" sz="4800" dirty="0">
+              <a:rPr lang="en-US" sz="3600" dirty="0">
                 <a:solidFill>
                   <a:schemeClr val="bg1"/>
                 </a:solidFill>
@@ -5297,8 +4944,8 @@
         </p:nvSpPr>
         <p:spPr>
           <a:xfrm>
-            <a:off x="682831" y="497702"/>
-            <a:ext cx="10826338" cy="5862596"/>
+            <a:off x="512123" y="1230527"/>
+            <a:ext cx="8119754" cy="4396947"/>
           </a:xfrm>
         </p:spPr>
         <p:txBody>
@@ -5307,7 +4954,7 @@
           </a:bodyPr>
           <a:lstStyle/>
           <a:p>
-            <a:endParaRPr lang="en-US" sz="4800" dirty="0">
+            <a:endParaRPr lang="en-US" sz="3600" dirty="0">
               <a:solidFill>
                 <a:schemeClr val="bg1"/>
               </a:solidFill>
@@ -5316,7 +4963,7 @@
             </a:endParaRPr>
           </a:p>
           <a:p>
-            <a:endParaRPr lang="en-US" sz="4800" dirty="0">
+            <a:endParaRPr lang="en-US" sz="3600" dirty="0">
               <a:solidFill>
                 <a:schemeClr val="bg1"/>
               </a:solidFill>
@@ -5326,7 +4973,7 @@
           </a:p>
           <a:p>
             <a:r>
-              <a:rPr lang="en-US" sz="4800" dirty="0">
+              <a:rPr lang="en-US" sz="3600" dirty="0">
                 <a:solidFill>
                   <a:schemeClr val="bg1"/>
                 </a:solidFill>
@@ -5338,7 +4985,7 @@
           </a:p>
           <a:p>
             <a:r>
-              <a:rPr lang="en-US" sz="4800" dirty="0">
+              <a:rPr lang="en-US" sz="3600" dirty="0">
                 <a:solidFill>
                   <a:schemeClr val="bg1"/>
                 </a:solidFill>
@@ -5348,7 +4995,7 @@
               <a:t>Thy </a:t>
             </a:r>
             <a:r>
-              <a:rPr lang="en-US" sz="4800" dirty="0" err="1">
+              <a:rPr lang="en-US" sz="3600" dirty="0" err="1">
                 <a:solidFill>
                   <a:schemeClr val="bg1"/>
                 </a:solidFill>
@@ -5358,7 +5005,7 @@
               <a:t>pow'r</a:t>
             </a:r>
             <a:r>
-              <a:rPr lang="en-US" sz="4800" dirty="0">
+              <a:rPr lang="en-US" sz="3600" dirty="0">
                 <a:solidFill>
                   <a:schemeClr val="bg1"/>
                 </a:solidFill>
@@ -5370,7 +5017,7 @@
           </a:p>
           <a:p>
             <a:r>
-              <a:rPr lang="en-US" sz="4800" dirty="0">
+              <a:rPr lang="en-US" sz="3600" dirty="0">
                 <a:solidFill>
                   <a:schemeClr val="bg1"/>
                 </a:solidFill>
@@ -5382,7 +5029,7 @@
           </a:p>
           <a:p>
             <a:r>
-              <a:rPr lang="en-US" sz="4800" dirty="0">
+              <a:rPr lang="en-US" sz="3600" dirty="0">
                 <a:solidFill>
                   <a:schemeClr val="bg1"/>
                 </a:solidFill>
@@ -5456,8 +5103,8 @@
         </p:nvSpPr>
         <p:spPr>
           <a:xfrm>
-            <a:off x="682831" y="497702"/>
-            <a:ext cx="10826338" cy="5862596"/>
+            <a:off x="512123" y="1230527"/>
+            <a:ext cx="8119754" cy="4396947"/>
           </a:xfrm>
         </p:spPr>
         <p:txBody>
@@ -5466,7 +5113,7 @@
           </a:bodyPr>
           <a:lstStyle/>
           <a:p>
-            <a:endParaRPr lang="en-US" sz="4800" dirty="0">
+            <a:endParaRPr lang="en-US" sz="3600" dirty="0">
               <a:solidFill>
                 <a:schemeClr val="bg1"/>
               </a:solidFill>
@@ -5475,7 +5122,7 @@
             </a:endParaRPr>
           </a:p>
           <a:p>
-            <a:endParaRPr lang="en-US" sz="4800" dirty="0">
+            <a:endParaRPr lang="en-US" sz="3600" dirty="0">
               <a:solidFill>
                 <a:schemeClr val="bg1"/>
               </a:solidFill>
@@ -5485,7 +5132,7 @@
           </a:p>
           <a:p>
             <a:r>
-              <a:rPr lang="en-US" sz="4800" dirty="0">
+              <a:rPr lang="en-US" sz="3600" dirty="0">
                 <a:solidFill>
                   <a:schemeClr val="bg1"/>
                 </a:solidFill>
@@ -5497,7 +5144,7 @@
           </a:p>
           <a:p>
             <a:r>
-              <a:rPr lang="en-US" sz="4800" dirty="0">
+              <a:rPr lang="en-US" sz="3600" dirty="0">
                 <a:solidFill>
                   <a:schemeClr val="bg1"/>
                 </a:solidFill>
@@ -5509,7 +5156,7 @@
           </a:p>
           <a:p>
             <a:r>
-              <a:rPr lang="en-US" sz="4800" dirty="0">
+              <a:rPr lang="en-US" sz="3600" dirty="0">
                 <a:solidFill>
                   <a:schemeClr val="bg1"/>
                 </a:solidFill>
@@ -5521,7 +5168,7 @@
           </a:p>
           <a:p>
             <a:r>
-              <a:rPr lang="en-US" sz="4800" dirty="0">
+              <a:rPr lang="en-US" sz="3600" dirty="0">
                 <a:solidFill>
                   <a:schemeClr val="bg1"/>
                 </a:solidFill>
@@ -5595,8 +5242,8 @@
         </p:nvSpPr>
         <p:spPr>
           <a:xfrm>
-            <a:off x="682831" y="497702"/>
-            <a:ext cx="10826338" cy="5862596"/>
+            <a:off x="512123" y="1230527"/>
+            <a:ext cx="8119754" cy="4396947"/>
           </a:xfrm>
         </p:spPr>
         <p:txBody>
@@ -5605,7 +5252,7 @@
           </a:bodyPr>
           <a:lstStyle/>
           <a:p>
-            <a:endParaRPr lang="en-US" sz="4800" dirty="0">
+            <a:endParaRPr lang="en-US" sz="3600" dirty="0">
               <a:solidFill>
                 <a:schemeClr val="bg1"/>
               </a:solidFill>
@@ -5614,7 +5261,7 @@
             </a:endParaRPr>
           </a:p>
           <a:p>
-            <a:endParaRPr lang="en-US" sz="4800" dirty="0">
+            <a:endParaRPr lang="en-US" sz="3600" dirty="0">
               <a:solidFill>
                 <a:schemeClr val="bg1"/>
               </a:solidFill>
@@ -5624,7 +5271,7 @@
           </a:p>
           <a:p>
             <a:r>
-              <a:rPr lang="en-US" sz="4800" dirty="0">
+              <a:rPr lang="en-US" sz="3600" dirty="0">
                 <a:solidFill>
                   <a:schemeClr val="bg1"/>
                 </a:solidFill>
@@ -5636,7 +5283,7 @@
           </a:p>
           <a:p>
             <a:r>
-              <a:rPr lang="en-US" sz="4800" dirty="0">
+              <a:rPr lang="en-US" sz="3600" dirty="0">
                 <a:solidFill>
                   <a:schemeClr val="bg1"/>
                 </a:solidFill>
@@ -5648,7 +5295,7 @@
           </a:p>
           <a:p>
             <a:r>
-              <a:rPr lang="en-US" sz="4800" dirty="0">
+              <a:rPr lang="en-US" sz="3600" dirty="0">
                 <a:solidFill>
                   <a:schemeClr val="bg1"/>
                 </a:solidFill>
@@ -5660,7 +5307,7 @@
           </a:p>
           <a:p>
             <a:r>
-              <a:rPr lang="en-US" sz="4800" dirty="0">
+              <a:rPr lang="en-US" sz="3600" dirty="0">
                 <a:solidFill>
                   <a:schemeClr val="bg1"/>
                 </a:solidFill>
@@ -5734,8 +5381,8 @@
         </p:nvSpPr>
         <p:spPr>
           <a:xfrm>
-            <a:off x="682831" y="497702"/>
-            <a:ext cx="10826338" cy="5862596"/>
+            <a:off x="512123" y="1230527"/>
+            <a:ext cx="8119754" cy="4396947"/>
           </a:xfrm>
         </p:spPr>
         <p:txBody>
@@ -5744,7 +5391,7 @@
           </a:bodyPr>
           <a:lstStyle/>
           <a:p>
-            <a:endParaRPr lang="en-US" sz="4800" dirty="0">
+            <a:endParaRPr lang="en-US" sz="3600" dirty="0">
               <a:solidFill>
                 <a:schemeClr val="bg1"/>
               </a:solidFill>
@@ -5753,7 +5400,7 @@
             </a:endParaRPr>
           </a:p>
           <a:p>
-            <a:endParaRPr lang="en-US" sz="4800" dirty="0">
+            <a:endParaRPr lang="en-US" sz="3600" dirty="0">
               <a:solidFill>
                 <a:schemeClr val="bg1"/>
               </a:solidFill>
@@ -5763,7 +5410,7 @@
           </a:p>
           <a:p>
             <a:r>
-              <a:rPr lang="en-US" sz="4800" dirty="0">
+              <a:rPr lang="en-US" sz="3600" dirty="0">
                 <a:solidFill>
                   <a:schemeClr val="bg1"/>
                 </a:solidFill>
@@ -5775,7 +5422,7 @@
           </a:p>
           <a:p>
             <a:r>
-              <a:rPr lang="en-US" sz="4800" dirty="0">
+              <a:rPr lang="en-US" sz="3600" dirty="0">
                 <a:solidFill>
                   <a:schemeClr val="bg1"/>
                 </a:solidFill>
@@ -5787,7 +5434,7 @@
           </a:p>
           <a:p>
             <a:r>
-              <a:rPr lang="en-US" sz="4800" dirty="0">
+              <a:rPr lang="en-US" sz="3600" dirty="0">
                 <a:solidFill>
                   <a:schemeClr val="bg1"/>
                 </a:solidFill>
@@ -5799,7 +5446,7 @@
           </a:p>
           <a:p>
             <a:r>
-              <a:rPr lang="en-US" sz="4800" dirty="0">
+              <a:rPr lang="en-US" sz="3600" dirty="0">
                 <a:solidFill>
                   <a:schemeClr val="bg1"/>
                 </a:solidFill>
@@ -5879,7 +5526,7 @@
           <a:lstStyle/>
           <a:p>
             <a:r>
-              <a:rPr lang="en-US" sz="5400" i="1" dirty="0">
+              <a:rPr lang="en-US" sz="4050" i="1" dirty="0">
                 <a:solidFill>
                   <a:schemeClr val="bg1"/>
                 </a:solidFill>
@@ -5887,12 +5534,6 @@
               </a:rPr>
               <a:t>Living Hope</a:t>
             </a:r>
-            <a:endParaRPr lang="en-US" sz="5400" i="1" dirty="0">
-              <a:solidFill>
-                <a:schemeClr val="bg1"/>
-              </a:solidFill>
-              <a:latin typeface="Avenir Oblique" panose="02000503020000020003" pitchFamily="2" charset="0"/>
-            </a:endParaRPr>
           </a:p>
         </p:txBody>
       </p:sp>
@@ -5958,8 +5599,8 @@
         </p:nvSpPr>
         <p:spPr>
           <a:xfrm>
-            <a:off x="682831" y="497702"/>
-            <a:ext cx="10826338" cy="5862596"/>
+            <a:off x="512123" y="1230527"/>
+            <a:ext cx="8119754" cy="4396947"/>
           </a:xfrm>
         </p:spPr>
         <p:txBody>
@@ -5968,7 +5609,7 @@
           </a:bodyPr>
           <a:lstStyle/>
           <a:p>
-            <a:endParaRPr lang="en-US" sz="4400" dirty="0">
+            <a:endParaRPr lang="en-US" sz="3300" dirty="0">
               <a:solidFill>
                 <a:schemeClr val="bg1"/>
               </a:solidFill>
@@ -5977,7 +5618,7 @@
             </a:endParaRPr>
           </a:p>
           <a:p>
-            <a:endParaRPr lang="en-US" sz="4400" dirty="0">
+            <a:endParaRPr lang="en-US" sz="3300" dirty="0">
               <a:solidFill>
                 <a:schemeClr val="bg1"/>
               </a:solidFill>
@@ -5987,7 +5628,7 @@
           </a:p>
           <a:p>
             <a:r>
-              <a:rPr lang="en-US" sz="4400" dirty="0">
+              <a:rPr lang="en-US" sz="3300" dirty="0">
                 <a:solidFill>
                   <a:schemeClr val="bg1"/>
                 </a:solidFill>
@@ -5999,7 +5640,7 @@
           </a:p>
           <a:p>
             <a:r>
-              <a:rPr lang="en-US" sz="4400" dirty="0">
+              <a:rPr lang="en-US" sz="3300" dirty="0">
                 <a:solidFill>
                   <a:schemeClr val="bg1"/>
                 </a:solidFill>
@@ -6011,7 +5652,7 @@
           </a:p>
           <a:p>
             <a:r>
-              <a:rPr lang="en-US" sz="4400" dirty="0">
+              <a:rPr lang="en-US" sz="3300" dirty="0">
                 <a:solidFill>
                   <a:schemeClr val="bg1"/>
                 </a:solidFill>
@@ -6023,7 +5664,7 @@
           </a:p>
           <a:p>
             <a:r>
-              <a:rPr lang="en-US" sz="4400" dirty="0">
+              <a:rPr lang="en-US" sz="3300" dirty="0">
                 <a:solidFill>
                   <a:schemeClr val="bg1"/>
                 </a:solidFill>
@@ -6097,8 +5738,8 @@
         </p:nvSpPr>
         <p:spPr>
           <a:xfrm>
-            <a:off x="682831" y="497702"/>
-            <a:ext cx="10826338" cy="5862596"/>
+            <a:off x="512123" y="1230527"/>
+            <a:ext cx="8119754" cy="4396947"/>
           </a:xfrm>
         </p:spPr>
         <p:txBody>
@@ -6107,7 +5748,7 @@
           </a:bodyPr>
           <a:lstStyle/>
           <a:p>
-            <a:endParaRPr lang="en-US" sz="4400" dirty="0">
+            <a:endParaRPr lang="en-US" sz="3300" dirty="0">
               <a:solidFill>
                 <a:schemeClr val="bg1"/>
               </a:solidFill>
@@ -6117,7 +5758,7 @@
           </a:p>
           <a:p>
             <a:r>
-              <a:rPr lang="en-US" sz="4400" dirty="0">
+              <a:rPr lang="en-US" sz="3300" dirty="0">
                 <a:solidFill>
                   <a:schemeClr val="bg1"/>
                 </a:solidFill>
@@ -6129,7 +5770,7 @@
           </a:p>
           <a:p>
             <a:r>
-              <a:rPr lang="en-US" sz="4400" dirty="0">
+              <a:rPr lang="en-US" sz="3300" dirty="0">
                 <a:solidFill>
                   <a:schemeClr val="bg1"/>
                 </a:solidFill>
@@ -6141,7 +5782,7 @@
           </a:p>
           <a:p>
             <a:r>
-              <a:rPr lang="en-US" sz="4400" dirty="0">
+              <a:rPr lang="en-US" sz="3300" dirty="0">
                 <a:solidFill>
                   <a:schemeClr val="bg1"/>
                 </a:solidFill>
@@ -6153,7 +5794,7 @@
           </a:p>
           <a:p>
             <a:r>
-              <a:rPr lang="en-US" sz="4400" dirty="0">
+              <a:rPr lang="en-US" sz="3300" dirty="0">
                 <a:solidFill>
                   <a:schemeClr val="bg1"/>
                 </a:solidFill>
@@ -6165,7 +5806,7 @@
           </a:p>
           <a:p>
             <a:r>
-              <a:rPr lang="en-US" sz="4400" dirty="0">
+              <a:rPr lang="en-US" sz="3300" dirty="0">
                 <a:solidFill>
                   <a:schemeClr val="bg1"/>
                 </a:solidFill>
@@ -6239,8 +5880,8 @@
         </p:nvSpPr>
         <p:spPr>
           <a:xfrm>
-            <a:off x="682831" y="497702"/>
-            <a:ext cx="10826338" cy="5862596"/>
+            <a:off x="512123" y="1230527"/>
+            <a:ext cx="8119754" cy="4396947"/>
           </a:xfrm>
         </p:spPr>
         <p:txBody>
@@ -6249,7 +5890,7 @@
           </a:bodyPr>
           <a:lstStyle/>
           <a:p>
-            <a:endParaRPr lang="en-US" sz="4800" dirty="0">
+            <a:endParaRPr lang="en-US" sz="3600" dirty="0">
               <a:solidFill>
                 <a:schemeClr val="bg1"/>
               </a:solidFill>
@@ -6258,7 +5899,7 @@
             </a:endParaRPr>
           </a:p>
           <a:p>
-            <a:endParaRPr lang="en-US" sz="4800" dirty="0">
+            <a:endParaRPr lang="en-US" sz="3600" dirty="0">
               <a:solidFill>
                 <a:schemeClr val="bg1"/>
               </a:solidFill>
@@ -6268,7 +5909,7 @@
           </a:p>
           <a:p>
             <a:r>
-              <a:rPr lang="en-US" sz="4800" dirty="0">
+              <a:rPr lang="en-US" sz="3600" dirty="0">
                 <a:solidFill>
                   <a:schemeClr val="bg1"/>
                 </a:solidFill>
@@ -6280,7 +5921,7 @@
           </a:p>
           <a:p>
             <a:r>
-              <a:rPr lang="en-US" sz="4800" dirty="0">
+              <a:rPr lang="en-US" sz="3600" dirty="0">
                 <a:solidFill>
                   <a:schemeClr val="bg1"/>
                 </a:solidFill>
@@ -6292,7 +5933,7 @@
           </a:p>
           <a:p>
             <a:r>
-              <a:rPr lang="en-US" sz="4800" dirty="0">
+              <a:rPr lang="en-US" sz="3600" dirty="0">
                 <a:solidFill>
                   <a:schemeClr val="bg1"/>
                 </a:solidFill>
@@ -6366,8 +6007,8 @@
         </p:nvSpPr>
         <p:spPr>
           <a:xfrm>
-            <a:off x="682831" y="497702"/>
-            <a:ext cx="10826338" cy="5862596"/>
+            <a:off x="512123" y="1230527"/>
+            <a:ext cx="8119754" cy="4396947"/>
           </a:xfrm>
         </p:spPr>
         <p:txBody>
@@ -6376,7 +6017,7 @@
           </a:bodyPr>
           <a:lstStyle/>
           <a:p>
-            <a:endParaRPr lang="en-US" sz="4400" dirty="0">
+            <a:endParaRPr lang="en-US" sz="3300" dirty="0">
               <a:solidFill>
                 <a:schemeClr val="bg1"/>
               </a:solidFill>
@@ -6386,7 +6027,7 @@
           </a:p>
           <a:p>
             <a:r>
-              <a:rPr lang="en-US" sz="4400" dirty="0">
+              <a:rPr lang="en-US" sz="3300" dirty="0">
                 <a:solidFill>
                   <a:schemeClr val="bg1"/>
                 </a:solidFill>
@@ -6398,7 +6039,7 @@
           </a:p>
           <a:p>
             <a:r>
-              <a:rPr lang="en-US" sz="4400" dirty="0">
+              <a:rPr lang="en-US" sz="3300" dirty="0">
                 <a:solidFill>
                   <a:schemeClr val="bg1"/>
                 </a:solidFill>
@@ -6410,7 +6051,7 @@
           </a:p>
           <a:p>
             <a:r>
-              <a:rPr lang="en-US" sz="4400" dirty="0">
+              <a:rPr lang="en-US" sz="3300" dirty="0">
                 <a:solidFill>
                   <a:schemeClr val="bg1"/>
                 </a:solidFill>
@@ -6422,7 +6063,7 @@
           </a:p>
           <a:p>
             <a:r>
-              <a:rPr lang="en-US" sz="4400" dirty="0">
+              <a:rPr lang="en-US" sz="3300" dirty="0">
                 <a:solidFill>
                   <a:schemeClr val="bg1"/>
                 </a:solidFill>
@@ -6434,7 +6075,7 @@
           </a:p>
           <a:p>
             <a:r>
-              <a:rPr lang="en-US" sz="4400" dirty="0">
+              <a:rPr lang="en-US" sz="3300" dirty="0">
                 <a:solidFill>
                   <a:schemeClr val="bg1"/>
                 </a:solidFill>
@@ -6446,7 +6087,7 @@
           </a:p>
           <a:p>
             <a:r>
-              <a:rPr lang="en-US" sz="4400" dirty="0">
+              <a:rPr lang="en-US" sz="3300" dirty="0">
                 <a:solidFill>
                   <a:schemeClr val="bg1"/>
                 </a:solidFill>
@@ -6520,8 +6161,8 @@
         </p:nvSpPr>
         <p:spPr>
           <a:xfrm>
-            <a:off x="682831" y="497702"/>
-            <a:ext cx="10826338" cy="5862596"/>
+            <a:off x="512123" y="1230527"/>
+            <a:ext cx="8119754" cy="4396947"/>
           </a:xfrm>
         </p:spPr>
         <p:txBody>
@@ -6530,7 +6171,7 @@
           </a:bodyPr>
           <a:lstStyle/>
           <a:p>
-            <a:endParaRPr lang="en-US" sz="4400" dirty="0">
+            <a:endParaRPr lang="en-US" sz="3300" dirty="0">
               <a:solidFill>
                 <a:schemeClr val="bg1"/>
               </a:solidFill>
@@ -6539,7 +6180,7 @@
             </a:endParaRPr>
           </a:p>
           <a:p>
-            <a:endParaRPr lang="en-US" sz="4400" dirty="0">
+            <a:endParaRPr lang="en-US" sz="3300" dirty="0">
               <a:solidFill>
                 <a:schemeClr val="bg1"/>
               </a:solidFill>
@@ -6549,7 +6190,7 @@
           </a:p>
           <a:p>
             <a:r>
-              <a:rPr lang="en-US" sz="4400" dirty="0">
+              <a:rPr lang="en-US" sz="3300" dirty="0">
                 <a:solidFill>
                   <a:schemeClr val="bg1"/>
                 </a:solidFill>
@@ -6561,7 +6202,7 @@
           </a:p>
           <a:p>
             <a:r>
-              <a:rPr lang="en-US" sz="4400" dirty="0">
+              <a:rPr lang="en-US" sz="3300" dirty="0">
                 <a:solidFill>
                   <a:schemeClr val="bg1"/>
                 </a:solidFill>
@@ -6573,7 +6214,7 @@
           </a:p>
           <a:p>
             <a:r>
-              <a:rPr lang="en-US" sz="4400" dirty="0">
+              <a:rPr lang="en-US" sz="3300" dirty="0">
                 <a:solidFill>
                   <a:schemeClr val="bg1"/>
                 </a:solidFill>
@@ -6585,7 +6226,7 @@
           </a:p>
           <a:p>
             <a:r>
-              <a:rPr lang="en-US" sz="4400" dirty="0">
+              <a:rPr lang="en-US" sz="3300" dirty="0">
                 <a:solidFill>
                   <a:schemeClr val="bg1"/>
                 </a:solidFill>
@@ -6659,8 +6300,8 @@
         </p:nvSpPr>
         <p:spPr>
           <a:xfrm>
-            <a:off x="682831" y="497702"/>
-            <a:ext cx="10826338" cy="5862596"/>
+            <a:off x="512123" y="1230527"/>
+            <a:ext cx="8119754" cy="4396947"/>
           </a:xfrm>
         </p:spPr>
         <p:txBody>
@@ -6669,7 +6310,7 @@
           </a:bodyPr>
           <a:lstStyle/>
           <a:p>
-            <a:endParaRPr lang="en-US" sz="4400" dirty="0">
+            <a:endParaRPr lang="en-US" sz="3300" dirty="0">
               <a:solidFill>
                 <a:schemeClr val="bg1"/>
               </a:solidFill>
@@ -6679,7 +6320,7 @@
           </a:p>
           <a:p>
             <a:r>
-              <a:rPr lang="en-US" sz="4400" dirty="0">
+              <a:rPr lang="en-US" sz="3300" dirty="0">
                 <a:solidFill>
                   <a:schemeClr val="bg1"/>
                 </a:solidFill>
@@ -6691,7 +6332,7 @@
           </a:p>
           <a:p>
             <a:r>
-              <a:rPr lang="en-US" sz="4400" dirty="0">
+              <a:rPr lang="en-US" sz="3300" dirty="0">
                 <a:solidFill>
                   <a:schemeClr val="bg1"/>
                 </a:solidFill>
@@ -6703,7 +6344,7 @@
           </a:p>
           <a:p>
             <a:r>
-              <a:rPr lang="en-US" sz="4400" dirty="0">
+              <a:rPr lang="en-US" sz="3300" dirty="0">
                 <a:solidFill>
                   <a:schemeClr val="bg1"/>
                 </a:solidFill>
@@ -6715,7 +6356,7 @@
           </a:p>
           <a:p>
             <a:r>
-              <a:rPr lang="en-US" sz="4400" dirty="0">
+              <a:rPr lang="en-US" sz="3300" dirty="0">
                 <a:solidFill>
                   <a:schemeClr val="bg1"/>
                 </a:solidFill>
@@ -6727,7 +6368,7 @@
           </a:p>
           <a:p>
             <a:r>
-              <a:rPr lang="en-US" sz="4400" dirty="0">
+              <a:rPr lang="en-US" sz="3300" dirty="0">
                 <a:solidFill>
                   <a:schemeClr val="bg1"/>
                 </a:solidFill>
@@ -6739,7 +6380,7 @@
           </a:p>
           <a:p>
             <a:r>
-              <a:rPr lang="en-US" sz="4400" dirty="0">
+              <a:rPr lang="en-US" sz="3300" dirty="0">
                 <a:solidFill>
                   <a:schemeClr val="bg1"/>
                 </a:solidFill>
@@ -6813,8 +6454,8 @@
         </p:nvSpPr>
         <p:spPr>
           <a:xfrm>
-            <a:off x="682831" y="497702"/>
-            <a:ext cx="10826338" cy="5862596"/>
+            <a:off x="512123" y="1230527"/>
+            <a:ext cx="8119754" cy="4396947"/>
           </a:xfrm>
         </p:spPr>
         <p:txBody>
@@ -6823,7 +6464,7 @@
           </a:bodyPr>
           <a:lstStyle/>
           <a:p>
-            <a:endParaRPr lang="en-US" sz="4400" dirty="0">
+            <a:endParaRPr lang="en-US" sz="3300" dirty="0">
               <a:solidFill>
                 <a:schemeClr val="bg1"/>
               </a:solidFill>
@@ -6832,7 +6473,7 @@
             </a:endParaRPr>
           </a:p>
           <a:p>
-            <a:endParaRPr lang="en-US" sz="4400" dirty="0">
+            <a:endParaRPr lang="en-US" sz="3300" dirty="0">
               <a:solidFill>
                 <a:schemeClr val="bg1"/>
               </a:solidFill>
@@ -6842,7 +6483,7 @@
           </a:p>
           <a:p>
             <a:r>
-              <a:rPr lang="en-US" sz="4400" dirty="0">
+              <a:rPr lang="en-US" sz="3300" dirty="0">
                 <a:solidFill>
                   <a:schemeClr val="bg1"/>
                 </a:solidFill>
@@ -6854,7 +6495,7 @@
           </a:p>
           <a:p>
             <a:r>
-              <a:rPr lang="en-US" sz="4400" dirty="0">
+              <a:rPr lang="en-US" sz="3300" dirty="0">
                 <a:solidFill>
                   <a:schemeClr val="bg1"/>
                 </a:solidFill>
@@ -6866,7 +6507,7 @@
           </a:p>
           <a:p>
             <a:r>
-              <a:rPr lang="en-US" sz="4400" dirty="0">
+              <a:rPr lang="en-US" sz="3300" dirty="0">
                 <a:solidFill>
                   <a:schemeClr val="bg1"/>
                 </a:solidFill>
@@ -6877,7 +6518,7 @@
             </a:r>
           </a:p>
           <a:p>
-            <a:endParaRPr lang="en-US" sz="4400" dirty="0">
+            <a:endParaRPr lang="en-US" sz="3300" dirty="0">
               <a:solidFill>
                 <a:schemeClr val="bg1"/>
               </a:solidFill>
@@ -6949,8 +6590,8 @@
         </p:nvSpPr>
         <p:spPr>
           <a:xfrm>
-            <a:off x="682831" y="497702"/>
-            <a:ext cx="10826338" cy="5862596"/>
+            <a:off x="512123" y="1230527"/>
+            <a:ext cx="8119754" cy="4396947"/>
           </a:xfrm>
         </p:spPr>
         <p:txBody>
@@ -6959,7 +6600,7 @@
           </a:bodyPr>
           <a:lstStyle/>
           <a:p>
-            <a:endParaRPr lang="en-US" sz="4400" dirty="0">
+            <a:endParaRPr lang="en-US" sz="3300" dirty="0">
               <a:solidFill>
                 <a:schemeClr val="bg1"/>
               </a:solidFill>
@@ -6968,7 +6609,7 @@
             </a:endParaRPr>
           </a:p>
           <a:p>
-            <a:endParaRPr lang="en-US" sz="4400" dirty="0">
+            <a:endParaRPr lang="en-US" sz="3300" dirty="0">
               <a:solidFill>
                 <a:schemeClr val="bg1"/>
               </a:solidFill>
@@ -6978,7 +6619,7 @@
           </a:p>
           <a:p>
             <a:r>
-              <a:rPr lang="en-US" sz="4400" dirty="0">
+              <a:rPr lang="en-US" sz="3300" dirty="0">
                 <a:solidFill>
                   <a:schemeClr val="bg1"/>
                 </a:solidFill>
@@ -6990,7 +6631,7 @@
           </a:p>
           <a:p>
             <a:r>
-              <a:rPr lang="en-US" sz="4400" dirty="0">
+              <a:rPr lang="en-US" sz="3300" dirty="0">
                 <a:solidFill>
                   <a:schemeClr val="bg1"/>
                 </a:solidFill>
@@ -7064,8 +6705,8 @@
         </p:nvSpPr>
         <p:spPr>
           <a:xfrm>
-            <a:off x="682831" y="497702"/>
-            <a:ext cx="10826338" cy="5862596"/>
+            <a:off x="512123" y="1230527"/>
+            <a:ext cx="8119754" cy="4396947"/>
           </a:xfrm>
         </p:spPr>
         <p:txBody>
@@ -7074,7 +6715,7 @@
           </a:bodyPr>
           <a:lstStyle/>
           <a:p>
-            <a:endParaRPr lang="en-US" sz="4400" dirty="0">
+            <a:endParaRPr lang="en-US" sz="3300" dirty="0">
               <a:solidFill>
                 <a:schemeClr val="bg1"/>
               </a:solidFill>
@@ -7083,7 +6724,7 @@
             </a:endParaRPr>
           </a:p>
           <a:p>
-            <a:endParaRPr lang="en-US" sz="4400" dirty="0">
+            <a:endParaRPr lang="en-US" sz="3300" dirty="0">
               <a:solidFill>
                 <a:schemeClr val="bg1"/>
               </a:solidFill>
@@ -7093,7 +6734,7 @@
           </a:p>
           <a:p>
             <a:r>
-              <a:rPr lang="en-US" sz="4400" dirty="0">
+              <a:rPr lang="en-US" sz="3300" dirty="0">
                 <a:solidFill>
                   <a:schemeClr val="bg1"/>
                 </a:solidFill>
@@ -7105,7 +6746,7 @@
           </a:p>
           <a:p>
             <a:r>
-              <a:rPr lang="en-US" sz="4400" dirty="0">
+              <a:rPr lang="en-US" sz="3300" dirty="0">
                 <a:solidFill>
                   <a:schemeClr val="bg1"/>
                 </a:solidFill>
@@ -7117,7 +6758,7 @@
           </a:p>
           <a:p>
             <a:r>
-              <a:rPr lang="en-US" sz="4400" dirty="0">
+              <a:rPr lang="en-US" sz="3300" dirty="0">
                 <a:solidFill>
                   <a:schemeClr val="bg1"/>
                 </a:solidFill>
@@ -7128,7 +6769,7 @@
             </a:r>
           </a:p>
           <a:p>
-            <a:endParaRPr lang="en-US" sz="4400" dirty="0">
+            <a:endParaRPr lang="en-US" sz="3300" dirty="0">
               <a:solidFill>
                 <a:schemeClr val="bg1"/>
               </a:solidFill>
@@ -7200,8 +6841,8 @@
         </p:nvSpPr>
         <p:spPr>
           <a:xfrm>
-            <a:off x="682831" y="497702"/>
-            <a:ext cx="10826338" cy="5862596"/>
+            <a:off x="512123" y="1230527"/>
+            <a:ext cx="8119754" cy="4396947"/>
           </a:xfrm>
         </p:spPr>
         <p:txBody>
@@ -7210,7 +6851,7 @@
           </a:bodyPr>
           <a:lstStyle/>
           <a:p>
-            <a:endParaRPr lang="en-US" sz="4400" dirty="0">
+            <a:endParaRPr lang="en-US" sz="3300" dirty="0">
               <a:solidFill>
                 <a:schemeClr val="bg1"/>
               </a:solidFill>
@@ -7219,7 +6860,7 @@
             </a:endParaRPr>
           </a:p>
           <a:p>
-            <a:endParaRPr lang="en-US" sz="4400" dirty="0">
+            <a:endParaRPr lang="en-US" sz="3300" dirty="0">
               <a:solidFill>
                 <a:schemeClr val="bg1"/>
               </a:solidFill>
@@ -7229,7 +6870,7 @@
           </a:p>
           <a:p>
             <a:r>
-              <a:rPr lang="en-US" sz="4400" dirty="0">
+              <a:rPr lang="en-US" sz="3300" dirty="0">
                 <a:solidFill>
                   <a:schemeClr val="bg1"/>
                 </a:solidFill>
@@ -7241,7 +6882,7 @@
           </a:p>
           <a:p>
             <a:r>
-              <a:rPr lang="en-US" sz="4400" dirty="0">
+              <a:rPr lang="en-US" sz="3300" dirty="0">
                 <a:solidFill>
                   <a:schemeClr val="bg1"/>
                 </a:solidFill>
@@ -7252,7 +6893,7 @@
             </a:r>
           </a:p>
           <a:p>
-            <a:endParaRPr lang="en-US" sz="4400" dirty="0">
+            <a:endParaRPr lang="en-US" sz="3300" dirty="0">
               <a:solidFill>
                 <a:schemeClr val="bg1"/>
               </a:solidFill>
@@ -7262,7 +6903,7 @@
           </a:p>
           <a:p>
             <a:r>
-              <a:rPr lang="en-US" sz="4400" dirty="0">
+              <a:rPr lang="en-US" sz="3300" dirty="0">
                 <a:solidFill>
                   <a:schemeClr val="bg1"/>
                 </a:solidFill>
@@ -7336,8 +6977,8 @@
         </p:nvSpPr>
         <p:spPr>
           <a:xfrm>
-            <a:off x="682831" y="497702"/>
-            <a:ext cx="10826338" cy="5862596"/>
+            <a:off x="512123" y="1230527"/>
+            <a:ext cx="8119754" cy="4396947"/>
           </a:xfrm>
         </p:spPr>
         <p:txBody>
@@ -7346,7 +6987,7 @@
           </a:bodyPr>
           <a:lstStyle/>
           <a:p>
-            <a:endParaRPr lang="en-US" sz="4400" dirty="0">
+            <a:endParaRPr lang="en-US" sz="3300" dirty="0">
               <a:solidFill>
                 <a:schemeClr val="bg1"/>
               </a:solidFill>
@@ -7356,7 +6997,7 @@
           </a:p>
           <a:p>
             <a:r>
-              <a:rPr lang="en-US" sz="4400" dirty="0">
+              <a:rPr lang="en-US" sz="3300" dirty="0">
                 <a:solidFill>
                   <a:schemeClr val="bg1"/>
                 </a:solidFill>
@@ -7368,7 +7009,7 @@
           </a:p>
           <a:p>
             <a:r>
-              <a:rPr lang="en-US" sz="4400" dirty="0">
+              <a:rPr lang="en-US" sz="3300" dirty="0">
                 <a:solidFill>
                   <a:schemeClr val="bg1"/>
                 </a:solidFill>
@@ -7380,7 +7021,7 @@
           </a:p>
           <a:p>
             <a:r>
-              <a:rPr lang="en-US" sz="4400" dirty="0">
+              <a:rPr lang="en-US" sz="3300" dirty="0">
                 <a:solidFill>
                   <a:schemeClr val="bg1"/>
                 </a:solidFill>
@@ -7392,7 +7033,7 @@
           </a:p>
           <a:p>
             <a:r>
-              <a:rPr lang="en-US" sz="4400" dirty="0">
+              <a:rPr lang="en-US" sz="3300" dirty="0">
                 <a:solidFill>
                   <a:schemeClr val="bg1"/>
                 </a:solidFill>
@@ -7404,7 +7045,7 @@
           </a:p>
           <a:p>
             <a:r>
-              <a:rPr lang="en-US" sz="4400" dirty="0">
+              <a:rPr lang="en-US" sz="3300" dirty="0">
                 <a:solidFill>
                   <a:schemeClr val="bg1"/>
                 </a:solidFill>
@@ -7416,7 +7057,7 @@
           </a:p>
           <a:p>
             <a:r>
-              <a:rPr lang="en-US" sz="4400" dirty="0">
+              <a:rPr lang="en-US" sz="3300" dirty="0">
                 <a:solidFill>
                   <a:schemeClr val="bg1"/>
                 </a:solidFill>
@@ -7490,8 +7131,8 @@
         </p:nvSpPr>
         <p:spPr>
           <a:xfrm>
-            <a:off x="682831" y="497702"/>
-            <a:ext cx="10826338" cy="5862596"/>
+            <a:off x="512123" y="1230527"/>
+            <a:ext cx="8119754" cy="4396947"/>
           </a:xfrm>
         </p:spPr>
         <p:txBody>
@@ -7500,7 +7141,7 @@
           </a:bodyPr>
           <a:lstStyle/>
           <a:p>
-            <a:endParaRPr lang="en-US" sz="4400" dirty="0">
+            <a:endParaRPr lang="en-US" sz="3300" dirty="0">
               <a:solidFill>
                 <a:schemeClr val="bg1"/>
               </a:solidFill>
@@ -7509,7 +7150,7 @@
             </a:endParaRPr>
           </a:p>
           <a:p>
-            <a:endParaRPr lang="en-US" sz="4400" dirty="0">
+            <a:endParaRPr lang="en-US" sz="3300" dirty="0">
               <a:solidFill>
                 <a:schemeClr val="bg1"/>
               </a:solidFill>
@@ -7519,7 +7160,7 @@
           </a:p>
           <a:p>
             <a:r>
-              <a:rPr lang="en-US" sz="4400" dirty="0">
+              <a:rPr lang="en-US" sz="3300" dirty="0">
                 <a:solidFill>
                   <a:schemeClr val="bg1"/>
                 </a:solidFill>
@@ -7531,7 +7172,7 @@
           </a:p>
           <a:p>
             <a:r>
-              <a:rPr lang="en-US" sz="4400" dirty="0">
+              <a:rPr lang="en-US" sz="3300" dirty="0">
                 <a:solidFill>
                   <a:schemeClr val="bg1"/>
                 </a:solidFill>
@@ -7611,7 +7252,7 @@
           <a:lstStyle/>
           <a:p>
             <a:r>
-              <a:rPr lang="en-US" sz="5400" i="1" dirty="0">
+              <a:rPr lang="en-US" sz="4050" i="1" dirty="0">
                 <a:solidFill>
                   <a:schemeClr val="bg1"/>
                 </a:solidFill>
@@ -7619,12 +7260,6 @@
               </a:rPr>
               <a:t>Cornerstone</a:t>
             </a:r>
-            <a:endParaRPr lang="en-US" sz="5400" i="1" dirty="0">
-              <a:solidFill>
-                <a:schemeClr val="bg1"/>
-              </a:solidFill>
-              <a:latin typeface="Avenir Oblique" panose="02000503020000020003" pitchFamily="2" charset="0"/>
-            </a:endParaRPr>
           </a:p>
         </p:txBody>
       </p:sp>
@@ -7690,8 +7325,8 @@
         </p:nvSpPr>
         <p:spPr>
           <a:xfrm>
-            <a:off x="682831" y="497702"/>
-            <a:ext cx="10826338" cy="5862596"/>
+            <a:off x="512123" y="1230527"/>
+            <a:ext cx="8119754" cy="4396947"/>
           </a:xfrm>
         </p:spPr>
         <p:txBody>
@@ -7700,7 +7335,7 @@
           </a:bodyPr>
           <a:lstStyle/>
           <a:p>
-            <a:endParaRPr lang="en-US" sz="4800" dirty="0">
+            <a:endParaRPr lang="en-US" sz="3600" dirty="0">
               <a:solidFill>
                 <a:schemeClr val="bg1"/>
               </a:solidFill>
@@ -7709,7 +7344,7 @@
             </a:endParaRPr>
           </a:p>
           <a:p>
-            <a:endParaRPr lang="en-US" sz="4800" dirty="0">
+            <a:endParaRPr lang="en-US" sz="3600" dirty="0">
               <a:solidFill>
                 <a:schemeClr val="bg1"/>
               </a:solidFill>
@@ -7719,7 +7354,7 @@
           </a:p>
           <a:p>
             <a:r>
-              <a:rPr lang="en-US" sz="4800" dirty="0">
+              <a:rPr lang="en-US" sz="3600" dirty="0">
                 <a:solidFill>
                   <a:schemeClr val="bg1"/>
                 </a:solidFill>
@@ -7731,7 +7366,7 @@
           </a:p>
           <a:p>
             <a:r>
-              <a:rPr lang="en-US" sz="4800" dirty="0">
+              <a:rPr lang="en-US" sz="3600" dirty="0">
                 <a:solidFill>
                   <a:schemeClr val="bg1"/>
                 </a:solidFill>
@@ -7805,8 +7440,8 @@
         </p:nvSpPr>
         <p:spPr>
           <a:xfrm>
-            <a:off x="682831" y="497702"/>
-            <a:ext cx="10826338" cy="5862596"/>
+            <a:off x="512123" y="1230527"/>
+            <a:ext cx="8119754" cy="4396947"/>
           </a:xfrm>
         </p:spPr>
         <p:txBody>
@@ -7815,7 +7450,7 @@
           </a:bodyPr>
           <a:lstStyle/>
           <a:p>
-            <a:endParaRPr lang="en-US" sz="4800" dirty="0">
+            <a:endParaRPr lang="en-US" sz="3600" dirty="0">
               <a:solidFill>
                 <a:schemeClr val="bg1"/>
               </a:solidFill>
@@ -7825,7 +7460,7 @@
           </a:p>
           <a:p>
             <a:r>
-              <a:rPr lang="en-US" sz="4800" dirty="0">
+              <a:rPr lang="en-US" sz="3600" dirty="0">
                 <a:solidFill>
                   <a:schemeClr val="bg1"/>
                 </a:solidFill>
@@ -7837,7 +7472,7 @@
           </a:p>
           <a:p>
             <a:r>
-              <a:rPr lang="en-US" sz="4800" dirty="0">
+              <a:rPr lang="en-US" sz="3600" dirty="0">
                 <a:solidFill>
                   <a:schemeClr val="bg1"/>
                 </a:solidFill>
@@ -7849,7 +7484,7 @@
           </a:p>
           <a:p>
             <a:r>
-              <a:rPr lang="en-US" sz="4800" dirty="0">
+              <a:rPr lang="en-US" sz="3600" dirty="0">
                 <a:solidFill>
                   <a:schemeClr val="bg1"/>
                 </a:solidFill>
@@ -7861,7 +7496,7 @@
           </a:p>
           <a:p>
             <a:r>
-              <a:rPr lang="en-US" sz="4800" dirty="0">
+              <a:rPr lang="en-US" sz="3600" dirty="0">
                 <a:solidFill>
                   <a:schemeClr val="bg1"/>
                 </a:solidFill>
@@ -7935,8 +7570,8 @@
         </p:nvSpPr>
         <p:spPr>
           <a:xfrm>
-            <a:off x="682831" y="497702"/>
-            <a:ext cx="10826338" cy="5862596"/>
+            <a:off x="512123" y="1230527"/>
+            <a:ext cx="8119754" cy="4396947"/>
           </a:xfrm>
         </p:spPr>
         <p:txBody>
@@ -7945,7 +7580,7 @@
           </a:bodyPr>
           <a:lstStyle/>
           <a:p>
-            <a:endParaRPr lang="en-US" sz="4800" dirty="0">
+            <a:endParaRPr lang="en-US" sz="3600" dirty="0">
               <a:solidFill>
                 <a:schemeClr val="bg1"/>
               </a:solidFill>
@@ -7955,7 +7590,7 @@
           </a:p>
           <a:p>
             <a:r>
-              <a:rPr lang="en-US" sz="4800" dirty="0">
+              <a:rPr lang="en-US" sz="3600" dirty="0">
                 <a:solidFill>
                   <a:schemeClr val="bg1"/>
                 </a:solidFill>
@@ -7967,7 +7602,7 @@
           </a:p>
           <a:p>
             <a:r>
-              <a:rPr lang="en-US" sz="4800" dirty="0">
+              <a:rPr lang="en-US" sz="3600" dirty="0">
                 <a:solidFill>
                   <a:schemeClr val="bg1"/>
                 </a:solidFill>
@@ -7979,7 +7614,7 @@
           </a:p>
           <a:p>
             <a:r>
-              <a:rPr lang="en-US" sz="4800" dirty="0">
+              <a:rPr lang="en-US" sz="3600" dirty="0">
                 <a:solidFill>
                   <a:schemeClr val="bg1"/>
                 </a:solidFill>
@@ -7990,7 +7625,7 @@
             </a:r>
           </a:p>
           <a:p>
-            <a:endParaRPr lang="en-US" sz="4800" dirty="0">
+            <a:endParaRPr lang="en-US" sz="3600" dirty="0">
               <a:solidFill>
                 <a:schemeClr val="bg1"/>
               </a:solidFill>
@@ -8000,7 +7635,7 @@
           </a:p>
           <a:p>
             <a:r>
-              <a:rPr lang="en-US" sz="4800" dirty="0">
+              <a:rPr lang="en-US" sz="3600" dirty="0">
                 <a:solidFill>
                   <a:schemeClr val="bg1"/>
                 </a:solidFill>
@@ -8074,8 +7709,8 @@
         </p:nvSpPr>
         <p:spPr>
           <a:xfrm>
-            <a:off x="682831" y="497702"/>
-            <a:ext cx="10826338" cy="5862596"/>
+            <a:off x="512123" y="1230527"/>
+            <a:ext cx="8119754" cy="4396947"/>
           </a:xfrm>
         </p:spPr>
         <p:txBody>
@@ -8084,7 +7719,7 @@
           </a:bodyPr>
           <a:lstStyle/>
           <a:p>
-            <a:endParaRPr lang="en-US" sz="4800" dirty="0">
+            <a:endParaRPr lang="en-US" sz="3600" dirty="0">
               <a:solidFill>
                 <a:schemeClr val="bg1"/>
               </a:solidFill>
@@ -8094,7 +7729,7 @@
           </a:p>
           <a:p>
             <a:r>
-              <a:rPr lang="en-US" sz="4800" dirty="0">
+              <a:rPr lang="en-US" sz="3600" dirty="0">
                 <a:solidFill>
                   <a:schemeClr val="bg1"/>
                 </a:solidFill>
@@ -8106,7 +7741,7 @@
           </a:p>
           <a:p>
             <a:r>
-              <a:rPr lang="en-US" sz="4800" dirty="0">
+              <a:rPr lang="en-US" sz="3600" dirty="0">
                 <a:solidFill>
                   <a:schemeClr val="bg1"/>
                 </a:solidFill>
@@ -8118,7 +7753,7 @@
           </a:p>
           <a:p>
             <a:r>
-              <a:rPr lang="en-US" sz="4800" dirty="0">
+              <a:rPr lang="en-US" sz="3600" dirty="0">
                 <a:solidFill>
                   <a:schemeClr val="bg1"/>
                 </a:solidFill>
@@ -8130,7 +7765,7 @@
           </a:p>
           <a:p>
             <a:r>
-              <a:rPr lang="en-US" sz="4800" dirty="0">
+              <a:rPr lang="en-US" sz="3600" dirty="0">
                 <a:solidFill>
                   <a:schemeClr val="bg1"/>
                 </a:solidFill>
@@ -8142,7 +7777,7 @@
           </a:p>
           <a:p>
             <a:r>
-              <a:rPr lang="en-US" sz="4800" dirty="0">
+              <a:rPr lang="en-US" sz="3600" dirty="0">
                 <a:solidFill>
                   <a:schemeClr val="bg1"/>
                 </a:solidFill>
@@ -8216,8 +7851,8 @@
         </p:nvSpPr>
         <p:spPr>
           <a:xfrm>
-            <a:off x="682831" y="497702"/>
-            <a:ext cx="10826338" cy="5862596"/>
+            <a:off x="512123" y="1230527"/>
+            <a:ext cx="8119754" cy="4396947"/>
           </a:xfrm>
         </p:spPr>
         <p:txBody>
@@ -8226,7 +7861,7 @@
           </a:bodyPr>
           <a:lstStyle/>
           <a:p>
-            <a:endParaRPr lang="en-US" sz="4800" dirty="0">
+            <a:endParaRPr lang="en-US" sz="3600" dirty="0">
               <a:solidFill>
                 <a:schemeClr val="bg1"/>
               </a:solidFill>
@@ -8236,7 +7871,7 @@
           </a:p>
           <a:p>
             <a:r>
-              <a:rPr lang="en-US" sz="4800" dirty="0">
+              <a:rPr lang="en-US" sz="3600" dirty="0">
                 <a:solidFill>
                   <a:schemeClr val="bg1"/>
                 </a:solidFill>
@@ -8248,7 +7883,7 @@
           </a:p>
           <a:p>
             <a:r>
-              <a:rPr lang="en-US" sz="4800" dirty="0">
+              <a:rPr lang="en-US" sz="3600" dirty="0">
                 <a:solidFill>
                   <a:schemeClr val="bg1"/>
                 </a:solidFill>
@@ -8260,7 +7895,7 @@
           </a:p>
           <a:p>
             <a:r>
-              <a:rPr lang="en-US" sz="4800" dirty="0">
+              <a:rPr lang="en-US" sz="3600" dirty="0">
                 <a:solidFill>
                   <a:schemeClr val="bg1"/>
                 </a:solidFill>
@@ -8271,7 +7906,7 @@
             </a:r>
           </a:p>
           <a:p>
-            <a:endParaRPr lang="en-US" sz="4800" dirty="0">
+            <a:endParaRPr lang="en-US" sz="3600" dirty="0">
               <a:solidFill>
                 <a:schemeClr val="bg1"/>
               </a:solidFill>
@@ -8281,7 +7916,7 @@
           </a:p>
           <a:p>
             <a:r>
-              <a:rPr lang="en-US" sz="4800" dirty="0">
+              <a:rPr lang="en-US" sz="3600" dirty="0">
                 <a:solidFill>
                   <a:schemeClr val="bg1"/>
                 </a:solidFill>
@@ -8355,8 +7990,8 @@
         </p:nvSpPr>
         <p:spPr>
           <a:xfrm>
-            <a:off x="682831" y="497702"/>
-            <a:ext cx="10826338" cy="5862596"/>
+            <a:off x="512123" y="1230527"/>
+            <a:ext cx="8119754" cy="4396947"/>
           </a:xfrm>
         </p:spPr>
         <p:txBody>
@@ -8365,7 +8000,7 @@
           </a:bodyPr>
           <a:lstStyle/>
           <a:p>
-            <a:endParaRPr lang="en-US" sz="4800" dirty="0">
+            <a:endParaRPr lang="en-US" sz="3600" dirty="0">
               <a:solidFill>
                 <a:schemeClr val="bg1"/>
               </a:solidFill>
@@ -8374,7 +8009,7 @@
             </a:endParaRPr>
           </a:p>
           <a:p>
-            <a:endParaRPr lang="en-US" sz="4800" dirty="0">
+            <a:endParaRPr lang="en-US" sz="3600" dirty="0">
               <a:solidFill>
                 <a:schemeClr val="bg1"/>
               </a:solidFill>
@@ -8384,7 +8019,7 @@
           </a:p>
           <a:p>
             <a:r>
-              <a:rPr lang="en-US" sz="4800" dirty="0">
+              <a:rPr lang="en-US" sz="3600" dirty="0">
                 <a:solidFill>
                   <a:schemeClr val="bg1"/>
                 </a:solidFill>
@@ -8395,7 +8030,7 @@
             </a:r>
           </a:p>
           <a:p>
-            <a:endParaRPr lang="en-US" sz="4800" dirty="0">
+            <a:endParaRPr lang="en-US" sz="3600" dirty="0">
               <a:solidFill>
                 <a:schemeClr val="bg1"/>
               </a:solidFill>
@@ -8405,7 +8040,7 @@
           </a:p>
           <a:p>
             <a:r>
-              <a:rPr lang="en-US" sz="4800" dirty="0">
+              <a:rPr lang="en-US" sz="3600" dirty="0">
                 <a:solidFill>
                   <a:schemeClr val="bg1"/>
                 </a:solidFill>
@@ -8479,8 +8114,8 @@
         </p:nvSpPr>
         <p:spPr>
           <a:xfrm>
-            <a:off x="682831" y="497702"/>
-            <a:ext cx="10826338" cy="5862596"/>
+            <a:off x="512123" y="1230527"/>
+            <a:ext cx="8119754" cy="4396947"/>
           </a:xfrm>
         </p:spPr>
         <p:txBody>
@@ -8489,7 +8124,7 @@
           </a:bodyPr>
           <a:lstStyle/>
           <a:p>
-            <a:endParaRPr lang="en-US" sz="4800" dirty="0">
+            <a:endParaRPr lang="en-US" sz="3600" dirty="0">
               <a:solidFill>
                 <a:schemeClr val="bg1"/>
               </a:solidFill>
@@ -8499,7 +8134,7 @@
           </a:p>
           <a:p>
             <a:r>
-              <a:rPr lang="en-US" sz="4800" dirty="0">
+              <a:rPr lang="en-US" sz="3600" dirty="0">
                 <a:solidFill>
                   <a:schemeClr val="bg1"/>
                 </a:solidFill>
@@ -8511,7 +8146,7 @@
           </a:p>
           <a:p>
             <a:r>
-              <a:rPr lang="en-US" sz="4800" dirty="0">
+              <a:rPr lang="en-US" sz="3600" dirty="0">
                 <a:solidFill>
                   <a:schemeClr val="bg1"/>
                 </a:solidFill>
@@ -8523,7 +8158,7 @@
           </a:p>
           <a:p>
             <a:r>
-              <a:rPr lang="en-US" sz="4800" dirty="0">
+              <a:rPr lang="en-US" sz="3600" dirty="0">
                 <a:solidFill>
                   <a:schemeClr val="bg1"/>
                 </a:solidFill>
@@ -8534,7 +8169,7 @@
             </a:r>
           </a:p>
           <a:p>
-            <a:endParaRPr lang="en-US" sz="4800" dirty="0">
+            <a:endParaRPr lang="en-US" sz="3600" dirty="0">
               <a:solidFill>
                 <a:schemeClr val="bg1"/>
               </a:solidFill>
@@ -8544,7 +8179,7 @@
           </a:p>
           <a:p>
             <a:r>
-              <a:rPr lang="en-US" sz="4800" dirty="0">
+              <a:rPr lang="en-US" sz="3600" dirty="0">
                 <a:solidFill>
                   <a:schemeClr val="bg1"/>
                 </a:solidFill>
@@ -8618,8 +8253,8 @@
         </p:nvSpPr>
         <p:spPr>
           <a:xfrm>
-            <a:off x="682831" y="497702"/>
-            <a:ext cx="10826338" cy="5862596"/>
+            <a:off x="512123" y="1230527"/>
+            <a:ext cx="8119754" cy="4396947"/>
           </a:xfrm>
         </p:spPr>
         <p:txBody>
@@ -8628,7 +8263,7 @@
           </a:bodyPr>
           <a:lstStyle/>
           <a:p>
-            <a:endParaRPr lang="en-US" sz="4800" dirty="0">
+            <a:endParaRPr lang="en-US" sz="3600" dirty="0">
               <a:solidFill>
                 <a:schemeClr val="bg1"/>
               </a:solidFill>
@@ -8638,7 +8273,7 @@
           </a:p>
           <a:p>
             <a:r>
-              <a:rPr lang="en-US" sz="4800" dirty="0">
+              <a:rPr lang="en-US" sz="3600" dirty="0">
                 <a:solidFill>
                   <a:schemeClr val="bg1"/>
                 </a:solidFill>
@@ -8650,7 +8285,7 @@
           </a:p>
           <a:p>
             <a:r>
-              <a:rPr lang="en-US" sz="4800" dirty="0">
+              <a:rPr lang="en-US" sz="3600" dirty="0">
                 <a:solidFill>
                   <a:schemeClr val="bg1"/>
                 </a:solidFill>
@@ -8662,7 +8297,7 @@
           </a:p>
           <a:p>
             <a:r>
-              <a:rPr lang="en-US" sz="4800" dirty="0">
+              <a:rPr lang="en-US" sz="3600" dirty="0">
                 <a:solidFill>
                   <a:schemeClr val="bg1"/>
                 </a:solidFill>
@@ -8674,7 +8309,7 @@
           </a:p>
           <a:p>
             <a:r>
-              <a:rPr lang="en-US" sz="4800" dirty="0">
+              <a:rPr lang="en-US" sz="3600" dirty="0">
                 <a:solidFill>
                   <a:schemeClr val="bg1"/>
                 </a:solidFill>
@@ -8748,8 +8383,8 @@
         </p:nvSpPr>
         <p:spPr>
           <a:xfrm>
-            <a:off x="682831" y="497702"/>
-            <a:ext cx="10826338" cy="5862596"/>
+            <a:off x="512123" y="1230527"/>
+            <a:ext cx="8119754" cy="4396947"/>
           </a:xfrm>
         </p:spPr>
         <p:txBody>
@@ -8758,7 +8393,7 @@
           </a:bodyPr>
           <a:lstStyle/>
           <a:p>
-            <a:endParaRPr lang="en-US" sz="4800" dirty="0">
+            <a:endParaRPr lang="en-US" sz="3600" dirty="0">
               <a:solidFill>
                 <a:schemeClr val="bg1"/>
               </a:solidFill>
@@ -8767,7 +8402,7 @@
             </a:endParaRPr>
           </a:p>
           <a:p>
-            <a:endParaRPr lang="en-US" sz="4800" dirty="0">
+            <a:endParaRPr lang="en-US" sz="3600" dirty="0">
               <a:solidFill>
                 <a:schemeClr val="bg1"/>
               </a:solidFill>
@@ -8777,7 +8412,7 @@
           </a:p>
           <a:p>
             <a:r>
-              <a:rPr lang="en-US" sz="4800" dirty="0">
+              <a:rPr lang="en-US" sz="3600" dirty="0">
                 <a:solidFill>
                   <a:schemeClr val="bg1"/>
                 </a:solidFill>
@@ -8789,7 +8424,7 @@
           </a:p>
           <a:p>
             <a:r>
-              <a:rPr lang="en-US" sz="4800" dirty="0">
+              <a:rPr lang="en-US" sz="3600" dirty="0">
                 <a:solidFill>
                   <a:schemeClr val="bg1"/>
                 </a:solidFill>
@@ -8801,7 +8436,7 @@
           </a:p>
           <a:p>
             <a:r>
-              <a:rPr lang="en-US" sz="4800" dirty="0">
+              <a:rPr lang="en-US" sz="3600" dirty="0">
                 <a:solidFill>
                   <a:schemeClr val="bg1"/>
                 </a:solidFill>
@@ -8813,7 +8448,7 @@
           </a:p>
           <a:p>
             <a:r>
-              <a:rPr lang="en-US" sz="4800" dirty="0">
+              <a:rPr lang="en-US" sz="3600" dirty="0">
                 <a:solidFill>
                   <a:schemeClr val="bg1"/>
                 </a:solidFill>
@@ -8887,8 +8522,8 @@
         </p:nvSpPr>
         <p:spPr>
           <a:xfrm>
-            <a:off x="682831" y="497702"/>
-            <a:ext cx="10826338" cy="5862596"/>
+            <a:off x="512123" y="1230527"/>
+            <a:ext cx="8119754" cy="4396947"/>
           </a:xfrm>
         </p:spPr>
         <p:txBody>
@@ -8897,7 +8532,7 @@
           </a:bodyPr>
           <a:lstStyle/>
           <a:p>
-            <a:endParaRPr lang="en-US" sz="4800" dirty="0">
+            <a:endParaRPr lang="en-US" sz="3600" dirty="0">
               <a:solidFill>
                 <a:schemeClr val="bg1"/>
               </a:solidFill>
@@ -8906,7 +8541,7 @@
             </a:endParaRPr>
           </a:p>
           <a:p>
-            <a:endParaRPr lang="en-US" sz="4800" dirty="0">
+            <a:endParaRPr lang="en-US" sz="3600" dirty="0">
               <a:solidFill>
                 <a:schemeClr val="bg1"/>
               </a:solidFill>
@@ -8916,7 +8551,7 @@
           </a:p>
           <a:p>
             <a:r>
-              <a:rPr lang="en-US" sz="4800" dirty="0">
+              <a:rPr lang="en-US" sz="3600" dirty="0">
                 <a:solidFill>
                   <a:schemeClr val="bg1"/>
                 </a:solidFill>
@@ -8928,7 +8563,7 @@
           </a:p>
           <a:p>
             <a:r>
-              <a:rPr lang="en-US" sz="4800" dirty="0">
+              <a:rPr lang="en-US" sz="3600" dirty="0">
                 <a:solidFill>
                   <a:schemeClr val="bg1"/>
                 </a:solidFill>
@@ -8940,7 +8575,7 @@
           </a:p>
           <a:p>
             <a:r>
-              <a:rPr lang="en-US" sz="4800" dirty="0">
+              <a:rPr lang="en-US" sz="3600" dirty="0">
                 <a:solidFill>
                   <a:schemeClr val="bg1"/>
                 </a:solidFill>
@@ -8952,7 +8587,7 @@
           </a:p>
           <a:p>
             <a:r>
-              <a:rPr lang="en-US" sz="4800" dirty="0">
+              <a:rPr lang="en-US" sz="3600" dirty="0">
                 <a:solidFill>
                   <a:schemeClr val="bg1"/>
                 </a:solidFill>
@@ -9026,8 +8661,8 @@
         </p:nvSpPr>
         <p:spPr>
           <a:xfrm>
-            <a:off x="682831" y="497702"/>
-            <a:ext cx="10826338" cy="5862596"/>
+            <a:off x="512123" y="1230527"/>
+            <a:ext cx="8119754" cy="4396947"/>
           </a:xfrm>
         </p:spPr>
         <p:txBody>
@@ -9036,7 +8671,7 @@
           </a:bodyPr>
           <a:lstStyle/>
           <a:p>
-            <a:endParaRPr lang="en-US" sz="4800" dirty="0">
+            <a:endParaRPr lang="en-US" sz="3600" dirty="0">
               <a:solidFill>
                 <a:schemeClr val="bg1"/>
               </a:solidFill>
@@ -9045,7 +8680,7 @@
             </a:endParaRPr>
           </a:p>
           <a:p>
-            <a:endParaRPr lang="en-US" sz="4800" dirty="0">
+            <a:endParaRPr lang="en-US" sz="3600" dirty="0">
               <a:solidFill>
                 <a:schemeClr val="bg1"/>
               </a:solidFill>
@@ -9055,7 +8690,7 @@
           </a:p>
           <a:p>
             <a:r>
-              <a:rPr lang="en-US" sz="4800" dirty="0">
+              <a:rPr lang="en-US" sz="3600" dirty="0">
                 <a:solidFill>
                   <a:schemeClr val="bg1"/>
                 </a:solidFill>
@@ -9067,7 +8702,7 @@
           </a:p>
           <a:p>
             <a:r>
-              <a:rPr lang="en-US" sz="4800" dirty="0">
+              <a:rPr lang="en-US" sz="3600" dirty="0">
                 <a:solidFill>
                   <a:schemeClr val="bg1"/>
                 </a:solidFill>
@@ -9079,7 +8714,7 @@
           </a:p>
           <a:p>
             <a:r>
-              <a:rPr lang="en-US" sz="4800" dirty="0">
+              <a:rPr lang="en-US" sz="3600" dirty="0">
                 <a:solidFill>
                   <a:schemeClr val="bg1"/>
                 </a:solidFill>
@@ -9153,8 +8788,8 @@
         </p:nvSpPr>
         <p:spPr>
           <a:xfrm>
-            <a:off x="682831" y="497702"/>
-            <a:ext cx="10826338" cy="5862596"/>
+            <a:off x="512123" y="1230527"/>
+            <a:ext cx="8119754" cy="4396947"/>
           </a:xfrm>
         </p:spPr>
         <p:txBody>
@@ -9163,7 +8798,7 @@
           </a:bodyPr>
           <a:lstStyle/>
           <a:p>
-            <a:endParaRPr lang="en-US" sz="4800" dirty="0">
+            <a:endParaRPr lang="en-US" sz="3600" dirty="0">
               <a:solidFill>
                 <a:schemeClr val="bg1"/>
               </a:solidFill>
@@ -9172,7 +8807,7 @@
             </a:endParaRPr>
           </a:p>
           <a:p>
-            <a:endParaRPr lang="en-US" sz="4800" dirty="0">
+            <a:endParaRPr lang="en-US" sz="3600" dirty="0">
               <a:solidFill>
                 <a:schemeClr val="bg1"/>
               </a:solidFill>
@@ -9182,7 +8817,7 @@
           </a:p>
           <a:p>
             <a:r>
-              <a:rPr lang="en-US" sz="4800" dirty="0">
+              <a:rPr lang="en-US" sz="3600" dirty="0">
                 <a:solidFill>
                   <a:schemeClr val="bg1"/>
                 </a:solidFill>
@@ -9194,7 +8829,7 @@
           </a:p>
           <a:p>
             <a:r>
-              <a:rPr lang="en-US" sz="4800" dirty="0">
+              <a:rPr lang="en-US" sz="3600" dirty="0">
                 <a:solidFill>
                   <a:schemeClr val="bg1"/>
                 </a:solidFill>
@@ -9206,7 +8841,7 @@
           </a:p>
           <a:p>
             <a:r>
-              <a:rPr lang="en-US" sz="4800" dirty="0">
+              <a:rPr lang="en-US" sz="3600" dirty="0">
                 <a:solidFill>
                   <a:schemeClr val="bg1"/>
                 </a:solidFill>
@@ -9280,8 +8915,8 @@
         </p:nvSpPr>
         <p:spPr>
           <a:xfrm>
-            <a:off x="682831" y="497702"/>
-            <a:ext cx="10826338" cy="5862596"/>
+            <a:off x="512123" y="1230527"/>
+            <a:ext cx="8119754" cy="4396947"/>
           </a:xfrm>
         </p:spPr>
         <p:txBody>
@@ -9290,7 +8925,7 @@
           </a:bodyPr>
           <a:lstStyle/>
           <a:p>
-            <a:endParaRPr lang="en-US" sz="4800" dirty="0">
+            <a:endParaRPr lang="en-US" sz="3600" dirty="0">
               <a:solidFill>
                 <a:schemeClr val="bg1"/>
               </a:solidFill>
@@ -9299,7 +8934,7 @@
             </a:endParaRPr>
           </a:p>
           <a:p>
-            <a:endParaRPr lang="en-US" sz="4800" dirty="0">
+            <a:endParaRPr lang="en-US" sz="3600" dirty="0">
               <a:solidFill>
                 <a:schemeClr val="bg1"/>
               </a:solidFill>
@@ -9309,7 +8944,7 @@
           </a:p>
           <a:p>
             <a:r>
-              <a:rPr lang="en-US" sz="4800" dirty="0">
+              <a:rPr lang="en-US" sz="3600" dirty="0">
                 <a:solidFill>
                   <a:schemeClr val="bg1"/>
                 </a:solidFill>
@@ -9321,7 +8956,7 @@
           </a:p>
           <a:p>
             <a:r>
-              <a:rPr lang="en-US" sz="4800" dirty="0">
+              <a:rPr lang="en-US" sz="3600" dirty="0">
                 <a:solidFill>
                   <a:schemeClr val="bg1"/>
                 </a:solidFill>
@@ -9349,7 +8984,7 @@
 <file path=ppt/theme/theme1.xml><?xml version="1.0" encoding="utf-8"?>
 <a:theme xmlns:a="http://schemas.openxmlformats.org/drawingml/2006/main" name="Office Theme">
   <a:themeElements>
-    <a:clrScheme name="Office">
+    <a:clrScheme name="Office Theme">
       <a:dk1>
         <a:sysClr val="windowText" lastClr="000000"/>
       </a:dk1>
@@ -9387,7 +9022,7 @@
         <a:srgbClr val="96607D"/>
       </a:folHlink>
     </a:clrScheme>
-    <a:fontScheme name="Office">
+    <a:fontScheme name="Office Theme">
       <a:majorFont>
         <a:latin typeface="Aptos Display" panose="02110004020202020204"/>
         <a:ea typeface=""/>
@@ -9493,7 +9128,7 @@
         <a:font script="Tfng" typeface="Ebrima"/>
       </a:minorFont>
     </a:fontScheme>
-    <a:fmtScheme name="Office">
+    <a:fmtScheme name="Office Theme">
       <a:fillStyleLst>
         <a:solidFill>
           <a:schemeClr val="phClr"/>
